--- a/python_course/chapter_02_working_with_data/working_with_data.pptx
+++ b/python_course/chapter_02_working_with_data/working_with_data.pptx
@@ -15,6 +15,10 @@
     <p:sldId id="263" r:id="rId14"/>
     <p:sldId id="264" r:id="rId15"/>
     <p:sldId id="265" r:id="rId16"/>
+    <p:sldId id="266" r:id="rId17"/>
+    <p:sldId id="267" r:id="rId18"/>
+    <p:sldId id="268" r:id="rId19"/>
+    <p:sldId id="269" r:id="rId20"/>
   </p:sldIdLst>
   <p:sldSz cx="12191695" cy="6858000" type="screen4x3"/>
   <p:notesSz cx="6858000" cy="9144000"/>
@@ -3148,8 +3152,8 @@
         </p:nvSpPr>
         <p:spPr>
           <a:xfrm>
-            <a:off x="914400" y="1828800"/>
-            <a:ext cx="10360152" cy="1371600"/>
+            <a:off x="914400" y="2286000"/>
+            <a:ext cx="10360152" cy="1097280"/>
           </a:xfrm>
           <a:prstGeom prst="rect">
             <a:avLst/>
@@ -3163,14 +3167,14 @@
           <a:lstStyle/>
           <a:p>
             <a:pPr algn="ctr">
-              <a:defRPr sz="5400" b="1">
+              <a:defRPr sz="4800" b="1">
                 <a:solidFill>
                   <a:srgbClr val="003366"/>
                 </a:solidFill>
               </a:defRPr>
             </a:pPr>
             <a:r>
-              <a:t>Chapter 2</a:t>
+              <a:t>Chapter 2: Working with Data</a:t>
             </a:r>
           </a:p>
         </p:txBody>
@@ -3184,7 +3188,7 @@
         <p:spPr>
           <a:xfrm>
             <a:off x="914400" y="3657600"/>
-            <a:ext cx="10360152" cy="548640"/>
+            <a:ext cx="10360152" cy="731520"/>
           </a:xfrm>
           <a:prstGeom prst="rect">
             <a:avLst/>
@@ -3205,42 +3209,7 @@
               </a:defRPr>
             </a:pPr>
             <a:r>
-              <a:t>Working with Data</a:t>
-            </a:r>
-          </a:p>
-        </p:txBody>
-      </p:sp>
-      <p:sp>
-        <p:nvSpPr>
-          <p:cNvPr id="5" name="TextBox 4"/>
-          <p:cNvSpPr txBox="1"/>
-          <p:nvPr/>
-        </p:nvSpPr>
-        <p:spPr>
-          <a:xfrm>
-            <a:off x="914400" y="4297680"/>
-            <a:ext cx="10360152" cy="548640"/>
-          </a:xfrm>
-          <a:prstGeom prst="rect">
-            <a:avLst/>
-          </a:prstGeom>
-          <a:noFill/>
-        </p:spPr>
-        <p:txBody>
-          <a:bodyPr wrap="none">
-            <a:spAutoFit/>
-          </a:bodyPr>
-          <a:lstStyle/>
-          <a:p>
-            <a:pPr algn="ctr">
-              <a:defRPr sz="2800">
-                <a:solidFill>
-                  <a:srgbClr val="4682B4"/>
-                </a:solidFill>
-              </a:defRPr>
-            </a:pPr>
-            <a:r>
-              <a:t>Interactive Programs &amp; Type Conversion</a:t>
+              <a:t>User Input, Type Conversion, and String Manipulation</a:t>
             </a:r>
           </a:p>
         </p:txBody>
@@ -3254,172 +3223,6 @@
 </file>
 
 <file path=ppt/slides/slide10.xml><?xml version="1.0" encoding="utf-8"?>
-<p:sld xmlns:a="http://schemas.openxmlformats.org/drawingml/2006/main" xmlns:p="http://schemas.openxmlformats.org/presentationml/2006/main" xmlns:r="http://schemas.openxmlformats.org/officeDocument/2006/relationships">
-  <p:cSld>
-    <p:spTree>
-      <p:nvGrpSpPr>
-        <p:cNvPr id="1" name=""/>
-        <p:cNvGrpSpPr/>
-        <p:nvPr/>
-      </p:nvGrpSpPr>
-      <p:grpSpPr/>
-      <p:sp>
-        <p:nvSpPr>
-          <p:cNvPr id="2" name="Rectangle 1"/>
-          <p:cNvSpPr/>
-          <p:nvPr/>
-        </p:nvSpPr>
-        <p:spPr>
-          <a:xfrm>
-            <a:off x="0" y="0"/>
-            <a:ext cx="12191695" cy="6858000"/>
-          </a:xfrm>
-          <a:prstGeom prst="rect">
-            <a:avLst/>
-          </a:prstGeom>
-          <a:solidFill>
-            <a:srgbClr val="F0F8FF"/>
-          </a:solidFill>
-          <a:ln>
-            <a:noFill/>
-          </a:ln>
-        </p:spPr>
-        <p:style>
-          <a:lnRef idx="1">
-            <a:schemeClr val="accent1"/>
-          </a:lnRef>
-          <a:fillRef idx="3">
-            <a:schemeClr val="accent1"/>
-          </a:fillRef>
-          <a:effectRef idx="2">
-            <a:schemeClr val="accent1"/>
-          </a:effectRef>
-          <a:fontRef idx="minor">
-            <a:schemeClr val="lt1"/>
-          </a:fontRef>
-        </p:style>
-        <p:txBody>
-          <a:bodyPr rtlCol="0" anchor="ctr"/>
-          <a:lstStyle/>
-          <a:p>
-            <a:pPr algn="ctr"/>
-          </a:p>
-        </p:txBody>
-      </p:sp>
-      <p:sp>
-        <p:nvSpPr>
-          <p:cNvPr id="3" name="TextBox 2"/>
-          <p:cNvSpPr txBox="1"/>
-          <p:nvPr/>
-        </p:nvSpPr>
-        <p:spPr>
-          <a:xfrm>
-            <a:off x="914400" y="1828800"/>
-            <a:ext cx="10360152" cy="1371600"/>
-          </a:xfrm>
-          <a:prstGeom prst="rect">
-            <a:avLst/>
-          </a:prstGeom>
-          <a:noFill/>
-        </p:spPr>
-        <p:txBody>
-          <a:bodyPr wrap="none">
-            <a:spAutoFit/>
-          </a:bodyPr>
-          <a:lstStyle/>
-          <a:p>
-            <a:pPr algn="ctr">
-              <a:defRPr sz="5400" b="1">
-                <a:solidFill>
-                  <a:srgbClr val="003366"/>
-                </a:solidFill>
-              </a:defRPr>
-            </a:pPr>
-            <a:r>
-              <a:t>Time to Build!</a:t>
-            </a:r>
-          </a:p>
-        </p:txBody>
-      </p:sp>
-      <p:sp>
-        <p:nvSpPr>
-          <p:cNvPr id="4" name="TextBox 3"/>
-          <p:cNvSpPr txBox="1"/>
-          <p:nvPr/>
-        </p:nvSpPr>
-        <p:spPr>
-          <a:xfrm>
-            <a:off x="914400" y="3657600"/>
-            <a:ext cx="10360152" cy="548640"/>
-          </a:xfrm>
-          <a:prstGeom prst="rect">
-            <a:avLst/>
-          </a:prstGeom>
-          <a:noFill/>
-        </p:spPr>
-        <p:txBody>
-          <a:bodyPr wrap="none">
-            <a:spAutoFit/>
-          </a:bodyPr>
-          <a:lstStyle/>
-          <a:p>
-            <a:pPr algn="ctr">
-              <a:defRPr sz="2800">
-                <a:solidFill>
-                  <a:srgbClr val="4682B4"/>
-                </a:solidFill>
-              </a:defRPr>
-            </a:pPr>
-            <a:r>
-              <a:t>Create interactive programs that respond to users</a:t>
-            </a:r>
-          </a:p>
-        </p:txBody>
-      </p:sp>
-      <p:sp>
-        <p:nvSpPr>
-          <p:cNvPr id="5" name="TextBox 4"/>
-          <p:cNvSpPr txBox="1"/>
-          <p:nvPr/>
-        </p:nvSpPr>
-        <p:spPr>
-          <a:xfrm>
-            <a:off x="914400" y="4297680"/>
-            <a:ext cx="10360152" cy="548640"/>
-          </a:xfrm>
-          <a:prstGeom prst="rect">
-            <a:avLst/>
-          </a:prstGeom>
-          <a:noFill/>
-        </p:spPr>
-        <p:txBody>
-          <a:bodyPr wrap="none">
-            <a:spAutoFit/>
-          </a:bodyPr>
-          <a:lstStyle/>
-          <a:p>
-            <a:pPr algn="ctr">
-              <a:defRPr sz="2800">
-                <a:solidFill>
-                  <a:srgbClr val="4682B4"/>
-                </a:solidFill>
-              </a:defRPr>
-            </a:pPr>
-            <a:r>
-              <a:t>Remember: Practice makes perfect! 💪</a:t>
-            </a:r>
-          </a:p>
-        </p:txBody>
-      </p:sp>
-    </p:spTree>
-  </p:cSld>
-  <p:clrMapOvr>
-    <a:masterClrMapping/>
-  </p:clrMapOvr>
-</p:sld>
-</file>
-
-<file path=ppt/slides/slide2.xml><?xml version="1.0" encoding="utf-8"?>
 <p:sld xmlns:a="http://schemas.openxmlformats.org/drawingml/2006/main" xmlns:p="http://schemas.openxmlformats.org/presentationml/2006/main" xmlns:r="http://schemas.openxmlformats.org/officeDocument/2006/relationships">
   <p:cSld>
     <p:spTree>
@@ -3523,8 +3326,8 @@
         </p:nvSpPr>
         <p:spPr>
           <a:xfrm>
-            <a:off x="457200" y="365760"/>
-            <a:ext cx="10972800" cy="731520"/>
+            <a:off x="457200" y="320040"/>
+            <a:ext cx="10972800" cy="640080"/>
           </a:xfrm>
           <a:prstGeom prst="rect">
             <a:avLst/>
@@ -3538,71 +3341,28 @@
           <a:lstStyle/>
           <a:p>
             <a:pPr>
-              <a:defRPr sz="4000" b="1">
+              <a:defRPr sz="3600" b="1">
                 <a:solidFill>
                   <a:srgbClr val="003366"/>
                 </a:solidFill>
               </a:defRPr>
             </a:pPr>
             <a:r>
-              <a:t>Getting User Input 💬</a:t>
-            </a:r>
-          </a:p>
-        </p:txBody>
-      </p:sp>
-      <p:sp>
-        <p:nvSpPr>
-          <p:cNvPr id="5" name="Rectangle 4"/>
-          <p:cNvSpPr/>
+              <a:t>String Formatting with F-Strings</a:t>
+            </a:r>
+          </a:p>
+        </p:txBody>
+      </p:sp>
+      <p:sp>
+        <p:nvSpPr>
+          <p:cNvPr id="5" name="TextBox 4"/>
+          <p:cNvSpPr txBox="1"/>
           <p:nvPr/>
         </p:nvSpPr>
         <p:spPr>
           <a:xfrm>
-            <a:off x="457200" y="1005840"/>
-            <a:ext cx="1828800" cy="45720"/>
-          </a:xfrm>
-          <a:prstGeom prst="rect">
-            <a:avLst/>
-          </a:prstGeom>
-          <a:solidFill>
-            <a:srgbClr val="0066CC"/>
-          </a:solidFill>
-          <a:ln>
-            <a:noFill/>
-          </a:ln>
-        </p:spPr>
-        <p:style>
-          <a:lnRef idx="1">
-            <a:schemeClr val="accent1"/>
-          </a:lnRef>
-          <a:fillRef idx="3">
-            <a:schemeClr val="accent1"/>
-          </a:fillRef>
-          <a:effectRef idx="2">
-            <a:schemeClr val="accent1"/>
-          </a:effectRef>
-          <a:fontRef idx="minor">
-            <a:schemeClr val="lt1"/>
-          </a:fontRef>
-        </p:style>
-        <p:txBody>
-          <a:bodyPr rtlCol="0" anchor="ctr"/>
-          <a:lstStyle/>
-          <a:p>
-            <a:pPr algn="ctr"/>
-          </a:p>
-        </p:txBody>
-      </p:sp>
-      <p:sp>
-        <p:nvSpPr>
-          <p:cNvPr id="6" name="TextBox 5"/>
-          <p:cNvSpPr txBox="1"/>
-          <p:nvPr/>
-        </p:nvSpPr>
-        <p:spPr>
-          <a:xfrm>
-            <a:off x="640080" y="1371600"/>
-            <a:ext cx="10789920" cy="4572000"/>
+            <a:off x="640080" y="1188720"/>
+            <a:ext cx="10789920" cy="5303520"/>
           </a:xfrm>
           <a:prstGeom prst="rect">
             <a:avLst/>
@@ -3617,61 +3377,286 @@
           <a:p>
             <a:pPr>
               <a:spcAft>
-                <a:spcPts val="800"/>
-              </a:spcAft>
-              <a:defRPr sz="2000" b="1">
-                <a:solidFill>
-                  <a:srgbClr val="333333"/>
-                </a:solidFill>
-              </a:defRPr>
-            </a:pPr>
-            <a:r>
-              <a:t>The input() function lets users interact with your program!</a:t>
-            </a:r>
-          </a:p>
-          <a:p>
-            <a:pPr>
-              <a:spcAft>
-                <a:spcPts val="800"/>
-              </a:spcAft>
-              <a:defRPr sz="2000" b="1">
-                <a:solidFill>
-                  <a:srgbClr val="333333"/>
-                </a:solidFill>
-              </a:defRPr>
-            </a:pPr>
-            <a:r>
-              <a:t>Basic Syntax:</a:t>
-            </a:r>
-          </a:p>
-          <a:p>
-            <a:pPr>
-              <a:spcAft>
-                <a:spcPts val="800"/>
-              </a:spcAft>
-              <a:defRPr sz="2000" b="1">
-                <a:solidFill>
-                  <a:srgbClr val="333333"/>
-                </a:solidFill>
-              </a:defRPr>
-            </a:pPr>
-            <a:r>
-              <a:t>Example:</a:t>
-            </a:r>
-          </a:p>
-          <a:p>
-            <a:pPr>
-              <a:spcAft>
-                <a:spcPts val="800"/>
-              </a:spcAft>
-              <a:defRPr sz="2000" b="1">
-                <a:solidFill>
-                  <a:srgbClr val="333333"/>
-                </a:solidFill>
-              </a:defRPr>
-            </a:pPr>
-            <a:r>
-              <a:t>Note:input() always returns a string (text)</a:t>
+                <a:spcPts val="600"/>
+              </a:spcAft>
+              <a:defRPr b="1" sz="2000">
+                <a:solidFill>
+                  <a:srgbClr val="333333"/>
+                </a:solidFill>
+              </a:defRPr>
+            </a:pPr>
+            <a:r>
+              <a:t>F-Strings (Formatted String Literals):</a:t>
+            </a:r>
+          </a:p>
+          <a:p>
+            <a:pPr>
+              <a:spcAft>
+                <a:spcPts val="600"/>
+              </a:spcAft>
+              <a:defRPr sz="1600">
+                <a:solidFill>
+                  <a:srgbClr val="333333"/>
+                </a:solidFill>
+              </a:defRPr>
+            </a:pPr>
+            <a:r>
+              <a:t>name = "Alice"</a:t>
+            </a:r>
+          </a:p>
+          <a:p>
+            <a:pPr>
+              <a:spcAft>
+                <a:spcPts val="600"/>
+              </a:spcAft>
+              <a:defRPr sz="1600">
+                <a:solidFill>
+                  <a:srgbClr val="333333"/>
+                </a:solidFill>
+              </a:defRPr>
+            </a:pPr>
+            <a:r>
+              <a:t>age = 25</a:t>
+            </a:r>
+          </a:p>
+          <a:p>
+            <a:pPr>
+              <a:spcAft>
+                <a:spcPts val="600"/>
+              </a:spcAft>
+              <a:defRPr sz="1600">
+                <a:solidFill>
+                  <a:srgbClr val="333333"/>
+                </a:solidFill>
+              </a:defRPr>
+            </a:pPr>
+            <a:r>
+              <a:t>f"My name is {name} and I am {age}"</a:t>
+            </a:r>
+          </a:p>
+          <a:p>
+            <a:pPr>
+              <a:spcAft>
+                <a:spcPts val="600"/>
+              </a:spcAft>
+              <a:defRPr b="1" sz="2000">
+                <a:solidFill>
+                  <a:srgbClr val="333333"/>
+                </a:solidFill>
+              </a:defRPr>
+            </a:pPr>
+            <a:r>
+              <a:t>Expressions in F-Strings:</a:t>
+            </a:r>
+          </a:p>
+          <a:p>
+            <a:pPr>
+              <a:spcAft>
+                <a:spcPts val="600"/>
+              </a:spcAft>
+              <a:defRPr sz="1600">
+                <a:solidFill>
+                  <a:srgbClr val="333333"/>
+                </a:solidFill>
+              </a:defRPr>
+            </a:pPr>
+            <a:r>
+              <a:t>f"Next year I will be {age + 1}"</a:t>
+            </a:r>
+          </a:p>
+          <a:p>
+            <a:pPr>
+              <a:spcAft>
+                <a:spcPts val="600"/>
+              </a:spcAft>
+              <a:defRPr sz="1600">
+                <a:solidFill>
+                  <a:srgbClr val="333333"/>
+                </a:solidFill>
+              </a:defRPr>
+            </a:pPr>
+            <a:r>
+              <a:t>f"Twice my age is {age * 2}"</a:t>
+            </a:r>
+          </a:p>
+          <a:p>
+            <a:pPr>
+              <a:spcAft>
+                <a:spcPts val="600"/>
+              </a:spcAft>
+              <a:defRPr b="1" sz="2000">
+                <a:solidFill>
+                  <a:srgbClr val="333333"/>
+                </a:solidFill>
+              </a:defRPr>
+            </a:pPr>
+            <a:r>
+              <a:t>Formatting Numbers:</a:t>
+            </a:r>
+          </a:p>
+          <a:p>
+            <a:pPr>
+              <a:spcAft>
+                <a:spcPts val="600"/>
+              </a:spcAft>
+              <a:defRPr sz="1600">
+                <a:solidFill>
+                  <a:srgbClr val="333333"/>
+                </a:solidFill>
+              </a:defRPr>
+            </a:pPr>
+            <a:r>
+              <a:t>price = 19.99</a:t>
+            </a:r>
+          </a:p>
+          <a:p>
+            <a:pPr>
+              <a:spcAft>
+                <a:spcPts val="600"/>
+              </a:spcAft>
+              <a:defRPr b="1" sz="2000">
+                <a:solidFill>
+                  <a:srgbClr val="333333"/>
+                </a:solidFill>
+              </a:defRPr>
+            </a:pPr>
+            <a:r>
+              <a:t>f"Price: ${price:.2f}"  # $19.99</a:t>
+            </a:r>
+          </a:p>
+          <a:p>
+            <a:pPr>
+              <a:spcAft>
+                <a:spcPts val="600"/>
+              </a:spcAft>
+              <a:defRPr sz="1600">
+                <a:solidFill>
+                  <a:srgbClr val="333333"/>
+                </a:solidFill>
+              </a:defRPr>
+            </a:pPr>
+            <a:r>
+              <a:t>pi = 3.14159265</a:t>
+            </a:r>
+          </a:p>
+          <a:p>
+            <a:pPr>
+              <a:spcAft>
+                <a:spcPts val="600"/>
+              </a:spcAft>
+              <a:defRPr b="1" sz="2000">
+                <a:solidFill>
+                  <a:srgbClr val="333333"/>
+                </a:solidFill>
+              </a:defRPr>
+            </a:pPr>
+            <a:r>
+              <a:t>f"Pi: {pi:.2f}"  # 3.14</a:t>
+            </a:r>
+          </a:p>
+          <a:p>
+            <a:pPr>
+              <a:spcAft>
+                <a:spcPts val="600"/>
+              </a:spcAft>
+              <a:defRPr b="1" sz="2000">
+                <a:solidFill>
+                  <a:srgbClr val="333333"/>
+                </a:solidFill>
+              </a:defRPr>
+            </a:pPr>
+            <a:r>
+              <a:t>f"Pi: {pi:.4f}"  # 3.1416</a:t>
+            </a:r>
+          </a:p>
+          <a:p>
+            <a:pPr>
+              <a:spcAft>
+                <a:spcPts val="600"/>
+              </a:spcAft>
+              <a:defRPr b="1" sz="2000">
+                <a:solidFill>
+                  <a:srgbClr val="333333"/>
+                </a:solidFill>
+              </a:defRPr>
+            </a:pPr>
+            <a:r>
+              <a:t>Alignment:</a:t>
+            </a:r>
+          </a:p>
+          <a:p>
+            <a:pPr>
+              <a:spcAft>
+                <a:spcPts val="600"/>
+              </a:spcAft>
+              <a:defRPr b="1" sz="2000">
+                <a:solidFill>
+                  <a:srgbClr val="333333"/>
+                </a:solidFill>
+              </a:defRPr>
+            </a:pPr>
+            <a:r>
+              <a:t>f"{name:&gt;10}"  # Right align in 10 spaces</a:t>
+            </a:r>
+          </a:p>
+          <a:p>
+            <a:pPr>
+              <a:spcAft>
+                <a:spcPts val="600"/>
+              </a:spcAft>
+              <a:defRPr b="1" sz="2000">
+                <a:solidFill>
+                  <a:srgbClr val="333333"/>
+                </a:solidFill>
+              </a:defRPr>
+            </a:pPr>
+            <a:r>
+              <a:t>f"{name:&lt;10}"  # Left align</a:t>
+            </a:r>
+          </a:p>
+          <a:p>
+            <a:pPr>
+              <a:spcAft>
+                <a:spcPts val="600"/>
+              </a:spcAft>
+              <a:defRPr b="1" sz="2000">
+                <a:solidFill>
+                  <a:srgbClr val="333333"/>
+                </a:solidFill>
+              </a:defRPr>
+            </a:pPr>
+            <a:r>
+              <a:t>f"{name:^10}"  # Center align</a:t>
+            </a:r>
+          </a:p>
+          <a:p>
+            <a:pPr>
+              <a:spcAft>
+                <a:spcPts val="600"/>
+              </a:spcAft>
+              <a:defRPr b="1" sz="2000">
+                <a:solidFill>
+                  <a:srgbClr val="333333"/>
+                </a:solidFill>
+              </a:defRPr>
+            </a:pPr>
+            <a:r>
+              <a:t>Multiple Variables:</a:t>
+            </a:r>
+          </a:p>
+          <a:p>
+            <a:pPr>
+              <a:spcAft>
+                <a:spcPts val="600"/>
+              </a:spcAft>
+              <a:defRPr sz="1600">
+                <a:solidFill>
+                  <a:srgbClr val="333333"/>
+                </a:solidFill>
+              </a:defRPr>
+            </a:pPr>
+            <a:r>
+              <a:t>f"{name} is {age} years old and lives in {city}"</a:t>
             </a:r>
           </a:p>
         </p:txBody>
@@ -3684,7 +3669,7 @@
 </p:sld>
 </file>
 
-<file path=ppt/slides/slide3.xml><?xml version="1.0" encoding="utf-8"?>
+<file path=ppt/slides/slide11.xml><?xml version="1.0" encoding="utf-8"?>
 <p:sld xmlns:a="http://schemas.openxmlformats.org/drawingml/2006/main" xmlns:p="http://schemas.openxmlformats.org/presentationml/2006/main" xmlns:r="http://schemas.openxmlformats.org/officeDocument/2006/relationships">
   <p:cSld>
     <p:spTree>
@@ -3788,8 +3773,8 @@
         </p:nvSpPr>
         <p:spPr>
           <a:xfrm>
-            <a:off x="457200" y="365760"/>
-            <a:ext cx="10972800" cy="731520"/>
+            <a:off x="457200" y="320040"/>
+            <a:ext cx="10972800" cy="640080"/>
           </a:xfrm>
           <a:prstGeom prst="rect">
             <a:avLst/>
@@ -3803,71 +3788,28 @@
           <a:lstStyle/>
           <a:p>
             <a:pPr>
-              <a:defRPr sz="4000" b="1">
+              <a:defRPr sz="3600" b="1">
                 <a:solidFill>
                   <a:srgbClr val="003366"/>
                 </a:solidFill>
               </a:defRPr>
             </a:pPr>
             <a:r>
-              <a:t>The Input Problem 🤔</a:t>
-            </a:r>
-          </a:p>
-        </p:txBody>
-      </p:sp>
-      <p:sp>
-        <p:nvSpPr>
-          <p:cNvPr id="5" name="Rectangle 4"/>
-          <p:cNvSpPr/>
+              <a:t>String Validation Methods</a:t>
+            </a:r>
+          </a:p>
+        </p:txBody>
+      </p:sp>
+      <p:sp>
+        <p:nvSpPr>
+          <p:cNvPr id="5" name="TextBox 4"/>
+          <p:cNvSpPr txBox="1"/>
           <p:nvPr/>
         </p:nvSpPr>
         <p:spPr>
           <a:xfrm>
-            <a:off x="457200" y="1005840"/>
-            <a:ext cx="1828800" cy="45720"/>
-          </a:xfrm>
-          <a:prstGeom prst="rect">
-            <a:avLst/>
-          </a:prstGeom>
-          <a:solidFill>
-            <a:srgbClr val="0066CC"/>
-          </a:solidFill>
-          <a:ln>
-            <a:noFill/>
-          </a:ln>
-        </p:spPr>
-        <p:style>
-          <a:lnRef idx="1">
-            <a:schemeClr val="accent1"/>
-          </a:lnRef>
-          <a:fillRef idx="3">
-            <a:schemeClr val="accent1"/>
-          </a:fillRef>
-          <a:effectRef idx="2">
-            <a:schemeClr val="accent1"/>
-          </a:effectRef>
-          <a:fontRef idx="minor">
-            <a:schemeClr val="lt1"/>
-          </a:fontRef>
-        </p:style>
-        <p:txBody>
-          <a:bodyPr rtlCol="0" anchor="ctr"/>
-          <a:lstStyle/>
-          <a:p>
-            <a:pPr algn="ctr"/>
-          </a:p>
-        </p:txBody>
-      </p:sp>
-      <p:sp>
-        <p:nvSpPr>
-          <p:cNvPr id="6" name="TextBox 5"/>
-          <p:cNvSpPr txBox="1"/>
-          <p:nvPr/>
-        </p:nvSpPr>
-        <p:spPr>
-          <a:xfrm>
-            <a:off x="640080" y="1371600"/>
-            <a:ext cx="10789920" cy="4572000"/>
+            <a:off x="640080" y="1188720"/>
+            <a:ext cx="10789920" cy="5303520"/>
           </a:xfrm>
           <a:prstGeom prst="rect">
             <a:avLst/>
@@ -3882,76 +3824,271 @@
           <a:p>
             <a:pPr>
               <a:spcAft>
-                <a:spcPts val="800"/>
-              </a:spcAft>
-              <a:defRPr sz="2000" b="1">
-                <a:solidFill>
-                  <a:srgbClr val="333333"/>
-                </a:solidFill>
-              </a:defRPr>
-            </a:pPr>
-            <a:r>
-              <a:t>❌ This Won't Work:</a:t>
-            </a:r>
-          </a:p>
-          <a:p>
-            <a:pPr>
-              <a:spcAft>
-                <a:spcPts val="800"/>
-              </a:spcAft>
-              <a:defRPr sz="2000" b="1">
-                <a:solidFill>
-                  <a:srgbClr val="333333"/>
-                </a:solidFill>
-              </a:defRPr>
-            </a:pPr>
-            <a:r>
-              <a:t>A string (text)</a:t>
-            </a:r>
-          </a:p>
-          <a:p>
-            <a:pPr>
-              <a:spcAft>
-                <a:spcPts val="800"/>
-              </a:spcAft>
-              <a:defRPr sz="2000" b="1">
-                <a:solidFill>
-                  <a:srgbClr val="333333"/>
-                </a:solidFill>
-              </a:defRPr>
-            </a:pPr>
-            <a:r>
-              <a:t>"25"</a:t>
-            </a:r>
-          </a:p>
-          <a:p>
-            <a:pPr>
-              <a:spcAft>
-                <a:spcPts val="800"/>
-              </a:spcAft>
-              <a:defRPr sz="2000" b="1">
-                <a:solidFill>
-                  <a:srgbClr val="333333"/>
-                </a:solidFill>
-              </a:defRPr>
-            </a:pPr>
-            <a:r>
-              <a:t>A number</a:t>
-            </a:r>
-          </a:p>
-          <a:p>
-            <a:pPr>
-              <a:spcAft>
-                <a:spcPts val="800"/>
-              </a:spcAft>
-              <a:defRPr sz="2000" b="1">
-                <a:solidFill>
-                  <a:srgbClr val="333333"/>
-                </a:solidFill>
-              </a:defRPr>
-            </a:pPr>
-            <a:r>
-              <a:t>Solution: Type Conversion! 🔄</a:t>
+                <a:spcPts val="600"/>
+              </a:spcAft>
+              <a:defRPr b="1" sz="2000">
+                <a:solidFill>
+                  <a:srgbClr val="333333"/>
+                </a:solidFill>
+              </a:defRPr>
+            </a:pPr>
+            <a:r>
+              <a:t>Checking String Content:</a:t>
+            </a:r>
+          </a:p>
+          <a:p>
+            <a:pPr>
+              <a:spcAft>
+                <a:spcPts val="600"/>
+              </a:spcAft>
+              <a:defRPr sz="1600">
+                <a:solidFill>
+                  <a:srgbClr val="333333"/>
+                </a:solidFill>
+              </a:defRPr>
+            </a:pPr>
+            <a:r>
+              <a:t>text.isalpha()</a:t>
+            </a:r>
+          </a:p>
+          <a:p>
+            <a:pPr>
+              <a:spcAft>
+                <a:spcPts val="600"/>
+              </a:spcAft>
+              <a:defRPr sz="1600">
+                <a:solidFill>
+                  <a:srgbClr val="333333"/>
+                </a:solidFill>
+              </a:defRPr>
+            </a:pPr>
+            <a:r>
+              <a:t># True if all letters</a:t>
+            </a:r>
+          </a:p>
+          <a:p>
+            <a:pPr>
+              <a:spcAft>
+                <a:spcPts val="600"/>
+              </a:spcAft>
+              <a:defRPr sz="1600">
+                <a:solidFill>
+                  <a:srgbClr val="333333"/>
+                </a:solidFill>
+              </a:defRPr>
+            </a:pPr>
+            <a:r>
+              <a:t>text.isdigit()</a:t>
+            </a:r>
+          </a:p>
+          <a:p>
+            <a:pPr>
+              <a:spcAft>
+                <a:spcPts val="600"/>
+              </a:spcAft>
+              <a:defRPr sz="1600">
+                <a:solidFill>
+                  <a:srgbClr val="333333"/>
+                </a:solidFill>
+              </a:defRPr>
+            </a:pPr>
+            <a:r>
+              <a:t># True if all digits</a:t>
+            </a:r>
+          </a:p>
+          <a:p>
+            <a:pPr>
+              <a:spcAft>
+                <a:spcPts val="600"/>
+              </a:spcAft>
+              <a:defRPr sz="1600">
+                <a:solidFill>
+                  <a:srgbClr val="333333"/>
+                </a:solidFill>
+              </a:defRPr>
+            </a:pPr>
+            <a:r>
+              <a:t>text.isalnum()</a:t>
+            </a:r>
+          </a:p>
+          <a:p>
+            <a:pPr>
+              <a:spcAft>
+                <a:spcPts val="600"/>
+              </a:spcAft>
+              <a:defRPr sz="1600">
+                <a:solidFill>
+                  <a:srgbClr val="333333"/>
+                </a:solidFill>
+              </a:defRPr>
+            </a:pPr>
+            <a:r>
+              <a:t># True if letters and/or digits</a:t>
+            </a:r>
+          </a:p>
+          <a:p>
+            <a:pPr>
+              <a:spcAft>
+                <a:spcPts val="600"/>
+              </a:spcAft>
+              <a:defRPr sz="1600">
+                <a:solidFill>
+                  <a:srgbClr val="333333"/>
+                </a:solidFill>
+              </a:defRPr>
+            </a:pPr>
+            <a:r>
+              <a:t>text.isspace()</a:t>
+            </a:r>
+          </a:p>
+          <a:p>
+            <a:pPr>
+              <a:spcAft>
+                <a:spcPts val="600"/>
+              </a:spcAft>
+              <a:defRPr sz="1600">
+                <a:solidFill>
+                  <a:srgbClr val="333333"/>
+                </a:solidFill>
+              </a:defRPr>
+            </a:pPr>
+            <a:r>
+              <a:t># True if all whitespace</a:t>
+            </a:r>
+          </a:p>
+          <a:p>
+            <a:pPr>
+              <a:spcAft>
+                <a:spcPts val="600"/>
+              </a:spcAft>
+              <a:defRPr sz="1600">
+                <a:solidFill>
+                  <a:srgbClr val="333333"/>
+                </a:solidFill>
+              </a:defRPr>
+            </a:pPr>
+            <a:r>
+              <a:t>text.isupper()</a:t>
+            </a:r>
+          </a:p>
+          <a:p>
+            <a:pPr>
+              <a:spcAft>
+                <a:spcPts val="600"/>
+              </a:spcAft>
+              <a:defRPr sz="1600">
+                <a:solidFill>
+                  <a:srgbClr val="333333"/>
+                </a:solidFill>
+              </a:defRPr>
+            </a:pPr>
+            <a:r>
+              <a:t># True if all uppercase</a:t>
+            </a:r>
+          </a:p>
+          <a:p>
+            <a:pPr>
+              <a:spcAft>
+                <a:spcPts val="600"/>
+              </a:spcAft>
+              <a:defRPr sz="1600">
+                <a:solidFill>
+                  <a:srgbClr val="333333"/>
+                </a:solidFill>
+              </a:defRPr>
+            </a:pPr>
+            <a:r>
+              <a:t>text.islower()</a:t>
+            </a:r>
+          </a:p>
+          <a:p>
+            <a:pPr>
+              <a:spcAft>
+                <a:spcPts val="600"/>
+              </a:spcAft>
+              <a:defRPr sz="1600">
+                <a:solidFill>
+                  <a:srgbClr val="333333"/>
+                </a:solidFill>
+              </a:defRPr>
+            </a:pPr>
+            <a:r>
+              <a:t># True if all lowercase</a:t>
+            </a:r>
+          </a:p>
+          <a:p>
+            <a:pPr>
+              <a:spcAft>
+                <a:spcPts val="600"/>
+              </a:spcAft>
+              <a:defRPr b="1" sz="2000">
+                <a:solidFill>
+                  <a:srgbClr val="333333"/>
+                </a:solidFill>
+              </a:defRPr>
+            </a:pPr>
+            <a:r>
+              <a:t>Practical Use Cases:</a:t>
+            </a:r>
+          </a:p>
+          <a:p>
+            <a:pPr>
+              <a:spcAft>
+                <a:spcPts val="600"/>
+              </a:spcAft>
+              <a:defRPr b="1" sz="2000">
+                <a:solidFill>
+                  <a:srgbClr val="333333"/>
+                </a:solidFill>
+              </a:defRPr>
+            </a:pPr>
+            <a:r>
+              <a:t>if password.isalnum():</a:t>
+            </a:r>
+          </a:p>
+          <a:p>
+            <a:pPr>
+              <a:spcAft>
+                <a:spcPts val="600"/>
+              </a:spcAft>
+              <a:defRPr sz="1600">
+                <a:solidFill>
+                  <a:srgbClr val="333333"/>
+                </a:solidFill>
+              </a:defRPr>
+            </a:pPr>
+            <a:r>
+              <a:t>    print("Valid password")</a:t>
+            </a:r>
+          </a:p>
+          <a:p>
+            <a:pPr>
+              <a:spcAft>
+                <a:spcPts val="600"/>
+              </a:spcAft>
+              <a:defRPr b="1" sz="2000">
+                <a:solidFill>
+                  <a:srgbClr val="333333"/>
+                </a:solidFill>
+              </a:defRPr>
+            </a:pPr>
+            <a:r>
+              <a:t>if user_input.isdigit():</a:t>
+            </a:r>
+          </a:p>
+          <a:p>
+            <a:pPr>
+              <a:spcAft>
+                <a:spcPts val="600"/>
+              </a:spcAft>
+              <a:defRPr sz="1600">
+                <a:solidFill>
+                  <a:srgbClr val="333333"/>
+                </a:solidFill>
+              </a:defRPr>
+            </a:pPr>
+            <a:r>
+              <a:t>    number = int(user_input)</a:t>
             </a:r>
           </a:p>
         </p:txBody>
@@ -3964,7 +4101,7 @@
 </p:sld>
 </file>
 
-<file path=ppt/slides/slide4.xml><?xml version="1.0" encoding="utf-8"?>
+<file path=ppt/slides/slide12.xml><?xml version="1.0" encoding="utf-8"?>
 <p:sld xmlns:a="http://schemas.openxmlformats.org/drawingml/2006/main" xmlns:p="http://schemas.openxmlformats.org/presentationml/2006/main" xmlns:r="http://schemas.openxmlformats.org/officeDocument/2006/relationships">
   <p:cSld>
     <p:spTree>
@@ -4068,8 +4205,8 @@
         </p:nvSpPr>
         <p:spPr>
           <a:xfrm>
-            <a:off x="457200" y="365760"/>
-            <a:ext cx="10972800" cy="731520"/>
+            <a:off x="457200" y="320040"/>
+            <a:ext cx="10972800" cy="640080"/>
           </a:xfrm>
           <a:prstGeom prst="rect">
             <a:avLst/>
@@ -4083,71 +4220,28 @@
           <a:lstStyle/>
           <a:p>
             <a:pPr>
-              <a:defRPr sz="4000" b="1">
+              <a:defRPr sz="3600" b="1">
                 <a:solidFill>
                   <a:srgbClr val="003366"/>
                 </a:solidFill>
               </a:defRPr>
             </a:pPr>
             <a:r>
-              <a:t>Type Conversion 🔄</a:t>
-            </a:r>
-          </a:p>
-        </p:txBody>
-      </p:sp>
-      <p:sp>
-        <p:nvSpPr>
-          <p:cNvPr id="5" name="Rectangle 4"/>
-          <p:cNvSpPr/>
+              <a:t>Escape Sequences</a:t>
+            </a:r>
+          </a:p>
+        </p:txBody>
+      </p:sp>
+      <p:sp>
+        <p:nvSpPr>
+          <p:cNvPr id="5" name="TextBox 4"/>
+          <p:cNvSpPr txBox="1"/>
           <p:nvPr/>
         </p:nvSpPr>
         <p:spPr>
           <a:xfrm>
-            <a:off x="457200" y="1005840"/>
-            <a:ext cx="1828800" cy="45720"/>
-          </a:xfrm>
-          <a:prstGeom prst="rect">
-            <a:avLst/>
-          </a:prstGeom>
-          <a:solidFill>
-            <a:srgbClr val="0066CC"/>
-          </a:solidFill>
-          <a:ln>
-            <a:noFill/>
-          </a:ln>
-        </p:spPr>
-        <p:style>
-          <a:lnRef idx="1">
-            <a:schemeClr val="accent1"/>
-          </a:lnRef>
-          <a:fillRef idx="3">
-            <a:schemeClr val="accent1"/>
-          </a:fillRef>
-          <a:effectRef idx="2">
-            <a:schemeClr val="accent1"/>
-          </a:effectRef>
-          <a:fontRef idx="minor">
-            <a:schemeClr val="lt1"/>
-          </a:fontRef>
-        </p:style>
-        <p:txBody>
-          <a:bodyPr rtlCol="0" anchor="ctr"/>
-          <a:lstStyle/>
-          <a:p>
-            <a:pPr algn="ctr"/>
-          </a:p>
-        </p:txBody>
-      </p:sp>
-      <p:sp>
-        <p:nvSpPr>
-          <p:cNvPr id="6" name="TextBox 5"/>
-          <p:cNvSpPr txBox="1"/>
-          <p:nvPr/>
-        </p:nvSpPr>
-        <p:spPr>
-          <a:xfrm>
-            <a:off x="640080" y="1371600"/>
-            <a:ext cx="10789920" cy="4572000"/>
+            <a:off x="640080" y="1188720"/>
+            <a:ext cx="10789920" cy="5303520"/>
           </a:xfrm>
           <a:prstGeom prst="rect">
             <a:avLst/>
@@ -4162,121 +4256,256 @@
           <a:p>
             <a:pPr>
               <a:spcAft>
-                <a:spcPts val="800"/>
-              </a:spcAft>
-              <a:defRPr sz="2000" b="1">
-                <a:solidFill>
-                  <a:srgbClr val="333333"/>
-                </a:solidFill>
-              </a:defRPr>
-            </a:pPr>
-            <a:r>
-              <a:t>Converting data from one type to another</a:t>
-            </a:r>
-          </a:p>
-          <a:p>
-            <a:pPr>
-              <a:spcAft>
-                <a:spcPts val="800"/>
-              </a:spcAft>
-              <a:defRPr sz="2000" b="1">
-                <a:solidFill>
-                  <a:srgbClr val="333333"/>
-                </a:solidFill>
-              </a:defRPr>
-            </a:pPr>
-            <a:r>
-              <a:t>int()</a:t>
-            </a:r>
-          </a:p>
-          <a:p>
-            <a:pPr>
-              <a:spcAft>
-                <a:spcPts val="800"/>
-              </a:spcAft>
-              <a:defRPr sz="2000" b="1">
-                <a:solidFill>
-                  <a:srgbClr val="333333"/>
-                </a:solidFill>
-              </a:defRPr>
-            </a:pPr>
-            <a:r>
-              <a:t>Convert to integer</a:t>
-            </a:r>
-          </a:p>
-          <a:p>
-            <a:pPr>
-              <a:spcAft>
-                <a:spcPts val="800"/>
-              </a:spcAft>
-              <a:defRPr sz="2000" b="1">
-                <a:solidFill>
-                  <a:srgbClr val="333333"/>
-                </a:solidFill>
-              </a:defRPr>
-            </a:pPr>
-            <a:r>
-              <a:t>float()</a:t>
-            </a:r>
-          </a:p>
-          <a:p>
-            <a:pPr>
-              <a:spcAft>
-                <a:spcPts val="800"/>
-              </a:spcAft>
-              <a:defRPr sz="2000" b="1">
-                <a:solidFill>
-                  <a:srgbClr val="333333"/>
-                </a:solidFill>
-              </a:defRPr>
-            </a:pPr>
-            <a:r>
-              <a:t>Convert to decimal</a:t>
-            </a:r>
-          </a:p>
-          <a:p>
-            <a:pPr>
-              <a:spcAft>
-                <a:spcPts val="800"/>
-              </a:spcAft>
-              <a:defRPr sz="2000" b="1">
-                <a:solidFill>
-                  <a:srgbClr val="333333"/>
-                </a:solidFill>
-              </a:defRPr>
-            </a:pPr>
-            <a:r>
-              <a:t>str()</a:t>
-            </a:r>
-          </a:p>
-          <a:p>
-            <a:pPr>
-              <a:spcAft>
-                <a:spcPts val="800"/>
-              </a:spcAft>
-              <a:defRPr sz="2000" b="1">
-                <a:solidFill>
-                  <a:srgbClr val="333333"/>
-                </a:solidFill>
-              </a:defRPr>
-            </a:pPr>
-            <a:r>
-              <a:t>Convert to string</a:t>
-            </a:r>
-          </a:p>
-          <a:p>
-            <a:pPr>
-              <a:spcAft>
-                <a:spcPts val="800"/>
-              </a:spcAft>
-              <a:defRPr sz="2000" b="1">
-                <a:solidFill>
-                  <a:srgbClr val="333333"/>
-                </a:solidFill>
-              </a:defRPr>
-            </a:pPr>
-            <a:r>
-              <a:t>✓ Now This Works:</a:t>
+                <a:spcPts val="600"/>
+              </a:spcAft>
+              <a:defRPr b="1" sz="2000">
+                <a:solidFill>
+                  <a:srgbClr val="333333"/>
+                </a:solidFill>
+              </a:defRPr>
+            </a:pPr>
+            <a:r>
+              <a:t>Special Characters in Strings:</a:t>
+            </a:r>
+          </a:p>
+          <a:p>
+            <a:pPr>
+              <a:spcAft>
+                <a:spcPts val="600"/>
+              </a:spcAft>
+              <a:defRPr b="1" sz="2000">
+                <a:solidFill>
+                  <a:srgbClr val="333333"/>
+                </a:solidFill>
+              </a:defRPr>
+            </a:pPr>
+            <a:r>
+              <a:t>Newline (\n):</a:t>
+            </a:r>
+          </a:p>
+          <a:p>
+            <a:pPr>
+              <a:spcAft>
+                <a:spcPts val="600"/>
+              </a:spcAft>
+              <a:defRPr sz="1600">
+                <a:solidFill>
+                  <a:srgbClr val="333333"/>
+                </a:solidFill>
+              </a:defRPr>
+            </a:pPr>
+            <a:r>
+              <a:t>print("Line 1\nLine 2")</a:t>
+            </a:r>
+          </a:p>
+          <a:p>
+            <a:pPr>
+              <a:spcAft>
+                <a:spcPts val="600"/>
+              </a:spcAft>
+              <a:defRPr sz="1600">
+                <a:solidFill>
+                  <a:srgbClr val="333333"/>
+                </a:solidFill>
+              </a:defRPr>
+            </a:pPr>
+            <a:r>
+              <a:t># Line 1</a:t>
+            </a:r>
+          </a:p>
+          <a:p>
+            <a:pPr>
+              <a:spcAft>
+                <a:spcPts val="600"/>
+              </a:spcAft>
+              <a:defRPr sz="1600">
+                <a:solidFill>
+                  <a:srgbClr val="333333"/>
+                </a:solidFill>
+              </a:defRPr>
+            </a:pPr>
+            <a:r>
+              <a:t># Line 2</a:t>
+            </a:r>
+          </a:p>
+          <a:p>
+            <a:pPr>
+              <a:spcAft>
+                <a:spcPts val="600"/>
+              </a:spcAft>
+              <a:defRPr b="1" sz="2000">
+                <a:solidFill>
+                  <a:srgbClr val="333333"/>
+                </a:solidFill>
+              </a:defRPr>
+            </a:pPr>
+            <a:r>
+              <a:t>Tab (\t):</a:t>
+            </a:r>
+          </a:p>
+          <a:p>
+            <a:pPr>
+              <a:spcAft>
+                <a:spcPts val="600"/>
+              </a:spcAft>
+              <a:defRPr b="1" sz="2000">
+                <a:solidFill>
+                  <a:srgbClr val="333333"/>
+                </a:solidFill>
+              </a:defRPr>
+            </a:pPr>
+            <a:r>
+              <a:t>print("Name:\tJohn")</a:t>
+            </a:r>
+          </a:p>
+          <a:p>
+            <a:pPr>
+              <a:spcAft>
+                <a:spcPts val="600"/>
+              </a:spcAft>
+              <a:defRPr b="1" sz="2000">
+                <a:solidFill>
+                  <a:srgbClr val="333333"/>
+                </a:solidFill>
+              </a:defRPr>
+            </a:pPr>
+            <a:r>
+              <a:t># Name:    John</a:t>
+            </a:r>
+          </a:p>
+          <a:p>
+            <a:pPr>
+              <a:spcAft>
+                <a:spcPts val="600"/>
+              </a:spcAft>
+              <a:defRPr b="1" sz="2000">
+                <a:solidFill>
+                  <a:srgbClr val="333333"/>
+                </a:solidFill>
+              </a:defRPr>
+            </a:pPr>
+            <a:r>
+              <a:t>Backslash (\\):</a:t>
+            </a:r>
+          </a:p>
+          <a:p>
+            <a:pPr>
+              <a:spcAft>
+                <a:spcPts val="600"/>
+              </a:spcAft>
+              <a:defRPr b="1" sz="2000">
+                <a:solidFill>
+                  <a:srgbClr val="333333"/>
+                </a:solidFill>
+              </a:defRPr>
+            </a:pPr>
+            <a:r>
+              <a:t>print("C:\\Users\\Documents")</a:t>
+            </a:r>
+          </a:p>
+          <a:p>
+            <a:pPr>
+              <a:spcAft>
+                <a:spcPts val="600"/>
+              </a:spcAft>
+              <a:defRPr b="1" sz="2000">
+                <a:solidFill>
+                  <a:srgbClr val="333333"/>
+                </a:solidFill>
+              </a:defRPr>
+            </a:pPr>
+            <a:r>
+              <a:t># C:\Users\Documents</a:t>
+            </a:r>
+          </a:p>
+          <a:p>
+            <a:pPr>
+              <a:spcAft>
+                <a:spcPts val="600"/>
+              </a:spcAft>
+              <a:defRPr b="1" sz="2000">
+                <a:solidFill>
+                  <a:srgbClr val="333333"/>
+                </a:solidFill>
+              </a:defRPr>
+            </a:pPr>
+            <a:r>
+              <a:t>Quotes Inside Strings:</a:t>
+            </a:r>
+          </a:p>
+          <a:p>
+            <a:pPr>
+              <a:spcAft>
+                <a:spcPts val="600"/>
+              </a:spcAft>
+              <a:defRPr sz="1600">
+                <a:solidFill>
+                  <a:srgbClr val="333333"/>
+                </a:solidFill>
+              </a:defRPr>
+            </a:pPr>
+            <a:r>
+              <a:t>print("She said \"Hello\"")</a:t>
+            </a:r>
+          </a:p>
+          <a:p>
+            <a:pPr>
+              <a:spcAft>
+                <a:spcPts val="600"/>
+              </a:spcAft>
+              <a:defRPr sz="1600">
+                <a:solidFill>
+                  <a:srgbClr val="333333"/>
+                </a:solidFill>
+              </a:defRPr>
+            </a:pPr>
+            <a:r>
+              <a:t>print('It\'s Python')</a:t>
+            </a:r>
+          </a:p>
+          <a:p>
+            <a:pPr>
+              <a:spcAft>
+                <a:spcPts val="600"/>
+              </a:spcAft>
+              <a:defRPr b="1" sz="2000">
+                <a:solidFill>
+                  <a:srgbClr val="333333"/>
+                </a:solidFill>
+              </a:defRPr>
+            </a:pPr>
+            <a:r>
+              <a:t>Raw Strings (r"..."):</a:t>
+            </a:r>
+          </a:p>
+          <a:p>
+            <a:pPr>
+              <a:spcAft>
+                <a:spcPts val="600"/>
+              </a:spcAft>
+              <a:defRPr b="1" sz="2000">
+                <a:solidFill>
+                  <a:srgbClr val="333333"/>
+                </a:solidFill>
+              </a:defRPr>
+            </a:pPr>
+            <a:r>
+              <a:t>path = r"C:\Users\Documents"</a:t>
+            </a:r>
+          </a:p>
+          <a:p>
+            <a:pPr>
+              <a:spcAft>
+                <a:spcPts val="600"/>
+              </a:spcAft>
+              <a:defRPr sz="1600">
+                <a:solidFill>
+                  <a:srgbClr val="333333"/>
+                </a:solidFill>
+              </a:defRPr>
+            </a:pPr>
+            <a:r>
+              <a:t># No escape processing</a:t>
             </a:r>
           </a:p>
         </p:txBody>
@@ -4289,7 +4518,7 @@
 </p:sld>
 </file>
 
-<file path=ppt/slides/slide5.xml><?xml version="1.0" encoding="utf-8"?>
+<file path=ppt/slides/slide13.xml><?xml version="1.0" encoding="utf-8"?>
 <p:sld xmlns:a="http://schemas.openxmlformats.org/drawingml/2006/main" xmlns:p="http://schemas.openxmlformats.org/presentationml/2006/main" xmlns:r="http://schemas.openxmlformats.org/officeDocument/2006/relationships">
   <p:cSld>
     <p:spTree>
@@ -4393,8 +4622,8 @@
         </p:nvSpPr>
         <p:spPr>
           <a:xfrm>
-            <a:off x="457200" y="365760"/>
-            <a:ext cx="10972800" cy="731520"/>
+            <a:off x="457200" y="320040"/>
+            <a:ext cx="10972800" cy="640080"/>
           </a:xfrm>
           <a:prstGeom prst="rect">
             <a:avLst/>
@@ -4408,71 +4637,28 @@
           <a:lstStyle/>
           <a:p>
             <a:pPr>
-              <a:defRPr sz="4000" b="1">
+              <a:defRPr sz="3600" b="1">
                 <a:solidFill>
                   <a:srgbClr val="003366"/>
                 </a:solidFill>
               </a:defRPr>
             </a:pPr>
             <a:r>
-              <a:t>Conversion Shortcut</a:t>
-            </a:r>
-          </a:p>
-        </p:txBody>
-      </p:sp>
-      <p:sp>
-        <p:nvSpPr>
-          <p:cNvPr id="5" name="Rectangle 4"/>
-          <p:cNvSpPr/>
+              <a:t>Building Interactive Programs</a:t>
+            </a:r>
+          </a:p>
+        </p:txBody>
+      </p:sp>
+      <p:sp>
+        <p:nvSpPr>
+          <p:cNvPr id="5" name="TextBox 4"/>
+          <p:cNvSpPr txBox="1"/>
           <p:nvPr/>
         </p:nvSpPr>
         <p:spPr>
           <a:xfrm>
-            <a:off x="457200" y="1005840"/>
-            <a:ext cx="1828800" cy="45720"/>
-          </a:xfrm>
-          <a:prstGeom prst="rect">
-            <a:avLst/>
-          </a:prstGeom>
-          <a:solidFill>
-            <a:srgbClr val="0066CC"/>
-          </a:solidFill>
-          <a:ln>
-            <a:noFill/>
-          </a:ln>
-        </p:spPr>
-        <p:style>
-          <a:lnRef idx="1">
-            <a:schemeClr val="accent1"/>
-          </a:lnRef>
-          <a:fillRef idx="3">
-            <a:schemeClr val="accent1"/>
-          </a:fillRef>
-          <a:effectRef idx="2">
-            <a:schemeClr val="accent1"/>
-          </a:effectRef>
-          <a:fontRef idx="minor">
-            <a:schemeClr val="lt1"/>
-          </a:fontRef>
-        </p:style>
-        <p:txBody>
-          <a:bodyPr rtlCol="0" anchor="ctr"/>
-          <a:lstStyle/>
-          <a:p>
-            <a:pPr algn="ctr"/>
-          </a:p>
-        </p:txBody>
-      </p:sp>
-      <p:sp>
-        <p:nvSpPr>
-          <p:cNvPr id="6" name="TextBox 5"/>
-          <p:cNvSpPr txBox="1"/>
-          <p:nvPr/>
-        </p:nvSpPr>
-        <p:spPr>
-          <a:xfrm>
-            <a:off x="640080" y="1371600"/>
-            <a:ext cx="10789920" cy="4572000"/>
+            <a:off x="640080" y="1188720"/>
+            <a:ext cx="10789920" cy="5303520"/>
           </a:xfrm>
           <a:prstGeom prst="rect">
             <a:avLst/>
@@ -4487,61 +4673,316 @@
           <a:p>
             <a:pPr>
               <a:spcAft>
-                <a:spcPts val="800"/>
-              </a:spcAft>
-              <a:defRPr sz="2000" b="1">
-                <a:solidFill>
-                  <a:srgbClr val="333333"/>
-                </a:solidFill>
-              </a:defRPr>
-            </a:pPr>
-            <a:r>
-              <a:t>You can combine input() with type conversion in one line!</a:t>
-            </a:r>
-          </a:p>
-          <a:p>
-            <a:pPr>
-              <a:spcAft>
-                <a:spcPts val="800"/>
-              </a:spcAft>
-              <a:defRPr sz="2000" b="1">
-                <a:solidFill>
-                  <a:srgbClr val="333333"/>
-                </a:solidFill>
-              </a:defRPr>
-            </a:pPr>
-            <a:r>
-              <a:t>Long Way:</a:t>
-            </a:r>
-          </a:p>
-          <a:p>
-            <a:pPr>
-              <a:spcAft>
-                <a:spcPts val="800"/>
-              </a:spcAft>
-              <a:defRPr sz="2000" b="1">
-                <a:solidFill>
-                  <a:srgbClr val="333333"/>
-                </a:solidFill>
-              </a:defRPr>
-            </a:pPr>
-            <a:r>
-              <a:t>Short Way:</a:t>
-            </a:r>
-          </a:p>
-          <a:p>
-            <a:pPr>
-              <a:spcAft>
-                <a:spcPts val="800"/>
-              </a:spcAft>
-              <a:defRPr sz="2000" b="1">
-                <a:solidFill>
-                  <a:srgbClr val="333333"/>
-                </a:solidFill>
-              </a:defRPr>
-            </a:pPr>
-            <a:r>
-              <a:t>More Examples:</a:t>
+                <a:spcPts val="600"/>
+              </a:spcAft>
+              <a:defRPr b="1" sz="2000">
+                <a:solidFill>
+                  <a:srgbClr val="333333"/>
+                </a:solidFill>
+              </a:defRPr>
+            </a:pPr>
+            <a:r>
+              <a:t>Complete Example: Personal Profile</a:t>
+            </a:r>
+          </a:p>
+          <a:p>
+            <a:pPr>
+              <a:spcAft>
+                <a:spcPts val="600"/>
+              </a:spcAft>
+              <a:defRPr sz="1600">
+                <a:solidFill>
+                  <a:srgbClr val="333333"/>
+                </a:solidFill>
+              </a:defRPr>
+            </a:pPr>
+            <a:r>
+              <a:t># Get user information</a:t>
+            </a:r>
+          </a:p>
+          <a:p>
+            <a:pPr>
+              <a:spcAft>
+                <a:spcPts val="600"/>
+              </a:spcAft>
+              <a:defRPr b="1" sz="2000">
+                <a:solidFill>
+                  <a:srgbClr val="333333"/>
+                </a:solidFill>
+              </a:defRPr>
+            </a:pPr>
+            <a:r>
+              <a:t>name = input("Name: ").strip().title()</a:t>
+            </a:r>
+          </a:p>
+          <a:p>
+            <a:pPr>
+              <a:spcAft>
+                <a:spcPts val="600"/>
+              </a:spcAft>
+              <a:defRPr b="1" sz="2000">
+                <a:solidFill>
+                  <a:srgbClr val="333333"/>
+                </a:solidFill>
+              </a:defRPr>
+            </a:pPr>
+            <a:r>
+              <a:t>age = int(input("Age: "))</a:t>
+            </a:r>
+          </a:p>
+          <a:p>
+            <a:pPr>
+              <a:spcAft>
+                <a:spcPts val="600"/>
+              </a:spcAft>
+              <a:defRPr b="1" sz="2000">
+                <a:solidFill>
+                  <a:srgbClr val="333333"/>
+                </a:solidFill>
+              </a:defRPr>
+            </a:pPr>
+            <a:r>
+              <a:t>city = input("City: ").strip().title()</a:t>
+            </a:r>
+          </a:p>
+          <a:p>
+            <a:pPr>
+              <a:spcAft>
+                <a:spcPts val="600"/>
+              </a:spcAft>
+              <a:defRPr b="1" sz="2000">
+                <a:solidFill>
+                  <a:srgbClr val="333333"/>
+                </a:solidFill>
+              </a:defRPr>
+            </a:pPr>
+            <a:r>
+              <a:t>hobby = input("Favorite hobby: ")</a:t>
+            </a:r>
+          </a:p>
+          <a:p>
+            <a:pPr>
+              <a:spcAft>
+                <a:spcPts val="600"/>
+              </a:spcAft>
+              <a:defRPr sz="1600">
+                <a:solidFill>
+                  <a:srgbClr val="333333"/>
+                </a:solidFill>
+              </a:defRPr>
+            </a:pPr>
+            <a:r>
+              <a:t># Create formatted profile</a:t>
+            </a:r>
+          </a:p>
+          <a:p>
+            <a:pPr>
+              <a:spcAft>
+                <a:spcPts val="600"/>
+              </a:spcAft>
+              <a:defRPr sz="1600">
+                <a:solidFill>
+                  <a:srgbClr val="333333"/>
+                </a:solidFill>
+              </a:defRPr>
+            </a:pPr>
+            <a:r>
+              <a:t>profile = f"""</a:t>
+            </a:r>
+          </a:p>
+          <a:p>
+            <a:pPr>
+              <a:spcAft>
+                <a:spcPts val="600"/>
+              </a:spcAft>
+              <a:defRPr sz="1600">
+                <a:solidFill>
+                  <a:srgbClr val="333333"/>
+                </a:solidFill>
+              </a:defRPr>
+            </a:pPr>
+            <a:r>
+              <a:t>========== PROFILE ==========</a:t>
+            </a:r>
+          </a:p>
+          <a:p>
+            <a:pPr>
+              <a:spcAft>
+                <a:spcPts val="600"/>
+              </a:spcAft>
+              <a:defRPr b="1" sz="2000">
+                <a:solidFill>
+                  <a:srgbClr val="333333"/>
+                </a:solidFill>
+              </a:defRPr>
+            </a:pPr>
+            <a:r>
+              <a:t>Name: {name}</a:t>
+            </a:r>
+          </a:p>
+          <a:p>
+            <a:pPr>
+              <a:spcAft>
+                <a:spcPts val="600"/>
+              </a:spcAft>
+              <a:defRPr b="1" sz="2000">
+                <a:solidFill>
+                  <a:srgbClr val="333333"/>
+                </a:solidFill>
+              </a:defRPr>
+            </a:pPr>
+            <a:r>
+              <a:t>Age: {age}</a:t>
+            </a:r>
+          </a:p>
+          <a:p>
+            <a:pPr>
+              <a:spcAft>
+                <a:spcPts val="600"/>
+              </a:spcAft>
+              <a:defRPr b="1" sz="2000">
+                <a:solidFill>
+                  <a:srgbClr val="333333"/>
+                </a:solidFill>
+              </a:defRPr>
+            </a:pPr>
+            <a:r>
+              <a:t>City: {city}</a:t>
+            </a:r>
+          </a:p>
+          <a:p>
+            <a:pPr>
+              <a:spcAft>
+                <a:spcPts val="600"/>
+              </a:spcAft>
+              <a:defRPr b="1" sz="2000">
+                <a:solidFill>
+                  <a:srgbClr val="333333"/>
+                </a:solidFill>
+              </a:defRPr>
+            </a:pPr>
+            <a:r>
+              <a:t>Hobby: {hobby}</a:t>
+            </a:r>
+          </a:p>
+          <a:p>
+            <a:pPr>
+              <a:spcAft>
+                <a:spcPts val="600"/>
+              </a:spcAft>
+              <a:defRPr sz="1600">
+                <a:solidFill>
+                  <a:srgbClr val="333333"/>
+                </a:solidFill>
+              </a:defRPr>
+            </a:pPr>
+            <a:r>
+              <a:t>=============================</a:t>
+            </a:r>
+          </a:p>
+          <a:p>
+            <a:pPr>
+              <a:spcAft>
+                <a:spcPts val="600"/>
+              </a:spcAft>
+              <a:defRPr sz="1600">
+                <a:solidFill>
+                  <a:srgbClr val="333333"/>
+                </a:solidFill>
+              </a:defRPr>
+            </a:pPr>
+            <a:r>
+              <a:t>"""</a:t>
+            </a:r>
+          </a:p>
+          <a:p>
+            <a:pPr>
+              <a:spcAft>
+                <a:spcPts val="600"/>
+              </a:spcAft>
+              <a:defRPr sz="1600">
+                <a:solidFill>
+                  <a:srgbClr val="333333"/>
+                </a:solidFill>
+              </a:defRPr>
+            </a:pPr>
+            <a:r>
+              <a:t>print(profile)</a:t>
+            </a:r>
+          </a:p>
+          <a:p>
+            <a:pPr>
+              <a:spcAft>
+                <a:spcPts val="600"/>
+              </a:spcAft>
+              <a:defRPr b="1" sz="2000">
+                <a:solidFill>
+                  <a:srgbClr val="333333"/>
+                </a:solidFill>
+              </a:defRPr>
+            </a:pPr>
+            <a:r>
+              <a:t>Key Techniques:</a:t>
+            </a:r>
+          </a:p>
+          <a:p>
+            <a:pPr lvl="1">
+              <a:spcAft>
+                <a:spcPts val="400"/>
+              </a:spcAft>
+              <a:defRPr sz="1600">
+                <a:solidFill>
+                  <a:srgbClr val="333333"/>
+                </a:solidFill>
+              </a:defRPr>
+            </a:pPr>
+            <a:r>
+              <a:t>• strip() to clean input</a:t>
+            </a:r>
+          </a:p>
+          <a:p>
+            <a:pPr lvl="1">
+              <a:spcAft>
+                <a:spcPts val="400"/>
+              </a:spcAft>
+              <a:defRPr sz="1600">
+                <a:solidFill>
+                  <a:srgbClr val="333333"/>
+                </a:solidFill>
+              </a:defRPr>
+            </a:pPr>
+            <a:r>
+              <a:t>• title() for proper capitalization</a:t>
+            </a:r>
+          </a:p>
+          <a:p>
+            <a:pPr lvl="1">
+              <a:spcAft>
+                <a:spcPts val="400"/>
+              </a:spcAft>
+              <a:defRPr sz="1600">
+                <a:solidFill>
+                  <a:srgbClr val="333333"/>
+                </a:solidFill>
+              </a:defRPr>
+            </a:pPr>
+            <a:r>
+              <a:t>• int() for numeric conversion</a:t>
+            </a:r>
+          </a:p>
+          <a:p>
+            <a:pPr lvl="1">
+              <a:spcAft>
+                <a:spcPts val="400"/>
+              </a:spcAft>
+              <a:defRPr sz="1600">
+                <a:solidFill>
+                  <a:srgbClr val="333333"/>
+                </a:solidFill>
+              </a:defRPr>
+            </a:pPr>
+            <a:r>
+              <a:t>• f-strings for formatting</a:t>
             </a:r>
           </a:p>
         </p:txBody>
@@ -4554,7 +4995,7 @@
 </p:sld>
 </file>
 
-<file path=ppt/slides/slide6.xml><?xml version="1.0" encoding="utf-8"?>
+<file path=ppt/slides/slide14.xml><?xml version="1.0" encoding="utf-8"?>
 <p:sld xmlns:a="http://schemas.openxmlformats.org/drawingml/2006/main" xmlns:p="http://schemas.openxmlformats.org/presentationml/2006/main" xmlns:r="http://schemas.openxmlformats.org/officeDocument/2006/relationships">
   <p:cSld>
     <p:spTree>
@@ -4658,8 +5099,8 @@
         </p:nvSpPr>
         <p:spPr>
           <a:xfrm>
-            <a:off x="457200" y="365760"/>
-            <a:ext cx="10972800" cy="731520"/>
+            <a:off x="457200" y="320040"/>
+            <a:ext cx="10972800" cy="640080"/>
           </a:xfrm>
           <a:prstGeom prst="rect">
             <a:avLst/>
@@ -4673,71 +5114,28 @@
           <a:lstStyle/>
           <a:p>
             <a:pPr>
-              <a:defRPr sz="4000" b="1">
+              <a:defRPr sz="3600" b="1">
                 <a:solidFill>
                   <a:srgbClr val="003366"/>
                 </a:solidFill>
               </a:defRPr>
             </a:pPr>
             <a:r>
-              <a:t>String Operations ✂️</a:t>
-            </a:r>
-          </a:p>
-        </p:txBody>
-      </p:sp>
-      <p:sp>
-        <p:nvSpPr>
-          <p:cNvPr id="5" name="Rectangle 4"/>
-          <p:cNvSpPr/>
+              <a:t>Common Patterns and Best Practices</a:t>
+            </a:r>
+          </a:p>
+        </p:txBody>
+      </p:sp>
+      <p:sp>
+        <p:nvSpPr>
+          <p:cNvPr id="5" name="TextBox 4"/>
+          <p:cNvSpPr txBox="1"/>
           <p:nvPr/>
         </p:nvSpPr>
         <p:spPr>
           <a:xfrm>
-            <a:off x="457200" y="1005840"/>
-            <a:ext cx="1828800" cy="45720"/>
-          </a:xfrm>
-          <a:prstGeom prst="rect">
-            <a:avLst/>
-          </a:prstGeom>
-          <a:solidFill>
-            <a:srgbClr val="0066CC"/>
-          </a:solidFill>
-          <a:ln>
-            <a:noFill/>
-          </a:ln>
-        </p:spPr>
-        <p:style>
-          <a:lnRef idx="1">
-            <a:schemeClr val="accent1"/>
-          </a:lnRef>
-          <a:fillRef idx="3">
-            <a:schemeClr val="accent1"/>
-          </a:fillRef>
-          <a:effectRef idx="2">
-            <a:schemeClr val="accent1"/>
-          </a:effectRef>
-          <a:fontRef idx="minor">
-            <a:schemeClr val="lt1"/>
-          </a:fontRef>
-        </p:style>
-        <p:txBody>
-          <a:bodyPr rtlCol="0" anchor="ctr"/>
-          <a:lstStyle/>
-          <a:p>
-            <a:pPr algn="ctr"/>
-          </a:p>
-        </p:txBody>
-      </p:sp>
-      <p:sp>
-        <p:nvSpPr>
-          <p:cNvPr id="6" name="TextBox 5"/>
-          <p:cNvSpPr txBox="1"/>
-          <p:nvPr/>
-        </p:nvSpPr>
-        <p:spPr>
-          <a:xfrm>
-            <a:off x="640080" y="1371600"/>
-            <a:ext cx="10789920" cy="4572000"/>
+            <a:off x="640080" y="1188720"/>
+            <a:ext cx="10789920" cy="5303520"/>
           </a:xfrm>
           <a:prstGeom prst="rect">
             <a:avLst/>
@@ -4752,46 +5150,271 @@
           <a:p>
             <a:pPr>
               <a:spcAft>
-                <a:spcPts val="800"/>
-              </a:spcAft>
-              <a:defRPr sz="2000" b="1">
-                <a:solidFill>
-                  <a:srgbClr val="333333"/>
-                </a:solidFill>
-              </a:defRPr>
-            </a:pPr>
-            <a:r>
-              <a:t>Concatenation (Joining)</a:t>
-            </a:r>
-          </a:p>
-          <a:p>
-            <a:pPr>
-              <a:spcAft>
-                <a:spcPts val="800"/>
-              </a:spcAft>
-              <a:defRPr sz="2000" b="1">
-                <a:solidFill>
-                  <a:srgbClr val="333333"/>
-                </a:solidFill>
-              </a:defRPr>
-            </a:pPr>
-            <a:r>
-              <a:t>Useful String Methods</a:t>
-            </a:r>
-          </a:p>
-          <a:p>
-            <a:pPr>
-              <a:spcAft>
-                <a:spcPts val="800"/>
-              </a:spcAft>
-              <a:defRPr sz="2000" b="1">
-                <a:solidFill>
-                  <a:srgbClr val="333333"/>
-                </a:solidFill>
-              </a:defRPr>
-            </a:pPr>
-            <a:r>
-              <a:t>String Length</a:t>
+                <a:spcPts val="600"/>
+              </a:spcAft>
+              <a:defRPr b="1" sz="2000">
+                <a:solidFill>
+                  <a:srgbClr val="333333"/>
+                </a:solidFill>
+              </a:defRPr>
+            </a:pPr>
+            <a:r>
+              <a:t>Pattern 1: Clean User Input</a:t>
+            </a:r>
+          </a:p>
+          <a:p>
+            <a:pPr>
+              <a:spcAft>
+                <a:spcPts val="600"/>
+              </a:spcAft>
+              <a:defRPr b="1" sz="2000">
+                <a:solidFill>
+                  <a:srgbClr val="333333"/>
+                </a:solidFill>
+              </a:defRPr>
+            </a:pPr>
+            <a:r>
+              <a:t>user_input = input("Enter: ").strip().lower()</a:t>
+            </a:r>
+          </a:p>
+          <a:p>
+            <a:pPr>
+              <a:spcAft>
+                <a:spcPts val="600"/>
+              </a:spcAft>
+              <a:defRPr b="1" sz="2000">
+                <a:solidFill>
+                  <a:srgbClr val="333333"/>
+                </a:solidFill>
+              </a:defRPr>
+            </a:pPr>
+            <a:r>
+              <a:t>Pattern 2: Validate Before Converting</a:t>
+            </a:r>
+          </a:p>
+          <a:p>
+            <a:pPr>
+              <a:spcAft>
+                <a:spcPts val="600"/>
+              </a:spcAft>
+              <a:defRPr b="1" sz="2000">
+                <a:solidFill>
+                  <a:srgbClr val="333333"/>
+                </a:solidFill>
+              </a:defRPr>
+            </a:pPr>
+            <a:r>
+              <a:t>age_str = input("Age: ")</a:t>
+            </a:r>
+          </a:p>
+          <a:p>
+            <a:pPr>
+              <a:spcAft>
+                <a:spcPts val="600"/>
+              </a:spcAft>
+              <a:defRPr b="1" sz="2000">
+                <a:solidFill>
+                  <a:srgbClr val="333333"/>
+                </a:solidFill>
+              </a:defRPr>
+            </a:pPr>
+            <a:r>
+              <a:t>if age_str.isdigit():</a:t>
+            </a:r>
+          </a:p>
+          <a:p>
+            <a:pPr>
+              <a:spcAft>
+                <a:spcPts val="600"/>
+              </a:spcAft>
+              <a:defRPr sz="1600">
+                <a:solidFill>
+                  <a:srgbClr val="333333"/>
+                </a:solidFill>
+              </a:defRPr>
+            </a:pPr>
+            <a:r>
+              <a:t>    age = int(age_str)</a:t>
+            </a:r>
+          </a:p>
+          <a:p>
+            <a:pPr>
+              <a:spcAft>
+                <a:spcPts val="600"/>
+              </a:spcAft>
+              <a:defRPr b="1" sz="2000">
+                <a:solidFill>
+                  <a:srgbClr val="333333"/>
+                </a:solidFill>
+              </a:defRPr>
+            </a:pPr>
+            <a:r>
+              <a:t>Pattern 3: Build Formatted Output</a:t>
+            </a:r>
+          </a:p>
+          <a:p>
+            <a:pPr>
+              <a:spcAft>
+                <a:spcPts val="600"/>
+              </a:spcAft>
+              <a:defRPr sz="1600">
+                <a:solidFill>
+                  <a:srgbClr val="333333"/>
+                </a:solidFill>
+              </a:defRPr>
+            </a:pPr>
+            <a:r>
+              <a:t>data = [name, str(age), city]</a:t>
+            </a:r>
+          </a:p>
+          <a:p>
+            <a:pPr>
+              <a:spcAft>
+                <a:spcPts val="600"/>
+              </a:spcAft>
+              <a:defRPr sz="1600">
+                <a:solidFill>
+                  <a:srgbClr val="333333"/>
+                </a:solidFill>
+              </a:defRPr>
+            </a:pPr>
+            <a:r>
+              <a:t>csv_line = ",".join(data)</a:t>
+            </a:r>
+          </a:p>
+          <a:p>
+            <a:pPr>
+              <a:spcAft>
+                <a:spcPts val="600"/>
+              </a:spcAft>
+              <a:defRPr b="1" sz="2000">
+                <a:solidFill>
+                  <a:srgbClr val="333333"/>
+                </a:solidFill>
+              </a:defRPr>
+            </a:pPr>
+            <a:r>
+              <a:t>Best Practices:</a:t>
+            </a:r>
+          </a:p>
+          <a:p>
+            <a:pPr lvl="1">
+              <a:spcAft>
+                <a:spcPts val="400"/>
+              </a:spcAft>
+              <a:defRPr sz="1600">
+                <a:solidFill>
+                  <a:srgbClr val="333333"/>
+                </a:solidFill>
+              </a:defRPr>
+            </a:pPr>
+            <a:r>
+              <a:t>• Always strip() user input</a:t>
+            </a:r>
+          </a:p>
+          <a:p>
+            <a:pPr lvl="1">
+              <a:spcAft>
+                <a:spcPts val="400"/>
+              </a:spcAft>
+              <a:defRPr sz="1600">
+                <a:solidFill>
+                  <a:srgbClr val="333333"/>
+                </a:solidFill>
+              </a:defRPr>
+            </a:pPr>
+            <a:r>
+              <a:t>• Convert types explicitly</a:t>
+            </a:r>
+          </a:p>
+          <a:p>
+            <a:pPr lvl="1">
+              <a:spcAft>
+                <a:spcPts val="400"/>
+              </a:spcAft>
+              <a:defRPr sz="1600">
+                <a:solidFill>
+                  <a:srgbClr val="333333"/>
+                </a:solidFill>
+              </a:defRPr>
+            </a:pPr>
+            <a:r>
+              <a:t>• Use f-strings for readability</a:t>
+            </a:r>
+          </a:p>
+          <a:p>
+            <a:pPr lvl="1">
+              <a:spcAft>
+                <a:spcPts val="400"/>
+              </a:spcAft>
+              <a:defRPr sz="1600">
+                <a:solidFill>
+                  <a:srgbClr val="333333"/>
+                </a:solidFill>
+              </a:defRPr>
+            </a:pPr>
+            <a:r>
+              <a:t>• Validate before processing</a:t>
+            </a:r>
+          </a:p>
+          <a:p>
+            <a:pPr>
+              <a:spcAft>
+                <a:spcPts val="600"/>
+              </a:spcAft>
+              <a:defRPr b="1" sz="2000">
+                <a:solidFill>
+                  <a:srgbClr val="333333"/>
+                </a:solidFill>
+              </a:defRPr>
+            </a:pPr>
+            <a:r>
+              <a:t>Common Mistakes to Avoid:</a:t>
+            </a:r>
+          </a:p>
+          <a:p>
+            <a:pPr lvl="1">
+              <a:spcAft>
+                <a:spcPts val="400"/>
+              </a:spcAft>
+              <a:defRPr sz="1600">
+                <a:solidFill>
+                  <a:srgbClr val="333333"/>
+                </a:solidFill>
+              </a:defRPr>
+            </a:pPr>
+            <a:r>
+              <a:t>• Forgetting input() returns string</a:t>
+            </a:r>
+          </a:p>
+          <a:p>
+            <a:pPr lvl="1">
+              <a:spcAft>
+                <a:spcPts val="400"/>
+              </a:spcAft>
+              <a:defRPr sz="1600">
+                <a:solidFill>
+                  <a:srgbClr val="333333"/>
+                </a:solidFill>
+              </a:defRPr>
+            </a:pPr>
+            <a:r>
+              <a:t>• Not handling edge cases (empty input)</a:t>
+            </a:r>
+          </a:p>
+          <a:p>
+            <a:pPr lvl="1">
+              <a:spcAft>
+                <a:spcPts val="400"/>
+              </a:spcAft>
+              <a:defRPr sz="1600">
+                <a:solidFill>
+                  <a:srgbClr val="333333"/>
+                </a:solidFill>
+              </a:defRPr>
+            </a:pPr>
+            <a:r>
+              <a:t>• Mixing + with strings and numbers</a:t>
             </a:r>
           </a:p>
         </p:txBody>
@@ -4804,7 +5427,7 @@
 </p:sld>
 </file>
 
-<file path=ppt/slides/slide7.xml><?xml version="1.0" encoding="utf-8"?>
+<file path=ppt/slides/slide2.xml><?xml version="1.0" encoding="utf-8"?>
 <p:sld xmlns:a="http://schemas.openxmlformats.org/drawingml/2006/main" xmlns:p="http://schemas.openxmlformats.org/presentationml/2006/main" xmlns:r="http://schemas.openxmlformats.org/officeDocument/2006/relationships">
   <p:cSld>
     <p:spTree>
@@ -4908,8 +5531,8 @@
         </p:nvSpPr>
         <p:spPr>
           <a:xfrm>
-            <a:off x="457200" y="365760"/>
-            <a:ext cx="10972800" cy="731520"/>
+            <a:off x="457200" y="320040"/>
+            <a:ext cx="10972800" cy="640080"/>
           </a:xfrm>
           <a:prstGeom prst="rect">
             <a:avLst/>
@@ -4923,71 +5546,28 @@
           <a:lstStyle/>
           <a:p>
             <a:pPr>
-              <a:defRPr sz="4000" b="1">
+              <a:defRPr sz="3600" b="1">
                 <a:solidFill>
                   <a:srgbClr val="003366"/>
                 </a:solidFill>
               </a:defRPr>
             </a:pPr>
             <a:r>
-              <a:t>Comments in Code 📝</a:t>
-            </a:r>
-          </a:p>
-        </p:txBody>
-      </p:sp>
-      <p:sp>
-        <p:nvSpPr>
-          <p:cNvPr id="5" name="Rectangle 4"/>
-          <p:cNvSpPr/>
+              <a:t>Getting User Input</a:t>
+            </a:r>
+          </a:p>
+        </p:txBody>
+      </p:sp>
+      <p:sp>
+        <p:nvSpPr>
+          <p:cNvPr id="5" name="TextBox 4"/>
+          <p:cNvSpPr txBox="1"/>
           <p:nvPr/>
         </p:nvSpPr>
         <p:spPr>
           <a:xfrm>
-            <a:off x="457200" y="1005840"/>
-            <a:ext cx="1828800" cy="45720"/>
-          </a:xfrm>
-          <a:prstGeom prst="rect">
-            <a:avLst/>
-          </a:prstGeom>
-          <a:solidFill>
-            <a:srgbClr val="0066CC"/>
-          </a:solidFill>
-          <a:ln>
-            <a:noFill/>
-          </a:ln>
-        </p:spPr>
-        <p:style>
-          <a:lnRef idx="1">
-            <a:schemeClr val="accent1"/>
-          </a:lnRef>
-          <a:fillRef idx="3">
-            <a:schemeClr val="accent1"/>
-          </a:fillRef>
-          <a:effectRef idx="2">
-            <a:schemeClr val="accent1"/>
-          </a:effectRef>
-          <a:fontRef idx="minor">
-            <a:schemeClr val="lt1"/>
-          </a:fontRef>
-        </p:style>
-        <p:txBody>
-          <a:bodyPr rtlCol="0" anchor="ctr"/>
-          <a:lstStyle/>
-          <a:p>
-            <a:pPr algn="ctr"/>
-          </a:p>
-        </p:txBody>
-      </p:sp>
-      <p:sp>
-        <p:nvSpPr>
-          <p:cNvPr id="6" name="TextBox 5"/>
-          <p:cNvSpPr txBox="1"/>
-          <p:nvPr/>
-        </p:nvSpPr>
-        <p:spPr>
-          <a:xfrm>
-            <a:off x="640080" y="1371600"/>
-            <a:ext cx="10789920" cy="4572000"/>
+            <a:off x="640080" y="1188720"/>
+            <a:ext cx="10789920" cy="5303520"/>
           </a:xfrm>
           <a:prstGeom prst="rect">
             <a:avLst/>
@@ -5002,76 +5582,241 @@
           <a:p>
             <a:pPr>
               <a:spcAft>
-                <a:spcPts val="800"/>
-              </a:spcAft>
-              <a:defRPr sz="2000" b="1">
-                <a:solidFill>
-                  <a:srgbClr val="333333"/>
-                </a:solidFill>
-              </a:defRPr>
-            </a:pPr>
-            <a:r>
-              <a:t>Comments are notes for humans - Python ignores them!</a:t>
-            </a:r>
-          </a:p>
-          <a:p>
-            <a:pPr>
-              <a:spcAft>
-                <a:spcPts val="800"/>
-              </a:spcAft>
-              <a:defRPr sz="2000" b="1">
-                <a:solidFill>
-                  <a:srgbClr val="333333"/>
-                </a:solidFill>
-              </a:defRPr>
-            </a:pPr>
-            <a:r>
-              <a:t>Single-Line Comments:</a:t>
-            </a:r>
-          </a:p>
-          <a:p>
-            <a:pPr>
-              <a:spcAft>
-                <a:spcPts val="800"/>
-              </a:spcAft>
-              <a:defRPr sz="2000" b="1">
-                <a:solidFill>
-                  <a:srgbClr val="333333"/>
-                </a:solidFill>
-              </a:defRPr>
-            </a:pPr>
-            <a:r>
-              <a:t>Multi-Line Comments:</a:t>
-            </a:r>
-          </a:p>
-          <a:p>
-            <a:pPr>
-              <a:spcAft>
-                <a:spcPts val="800"/>
-              </a:spcAft>
-              <a:defRPr sz="2000" b="1">
-                <a:solidFill>
-                  <a:srgbClr val="333333"/>
-                </a:solidFill>
-              </a:defRPr>
-            </a:pPr>
-            <a:r>
-              <a:t>Explain WHY, not WHAT</a:t>
-            </a:r>
-          </a:p>
-          <a:p>
-            <a:pPr>
-              <a:spcAft>
-                <a:spcPts val="800"/>
-              </a:spcAft>
-              <a:defRPr sz="2000" b="1">
-                <a:solidFill>
-                  <a:srgbClr val="333333"/>
-                </a:solidFill>
-              </a:defRPr>
-            </a:pPr>
-            <a:r>
-              <a:t>Document complex logic</a:t>
+                <a:spcPts val="600"/>
+              </a:spcAft>
+              <a:defRPr b="1" sz="2000">
+                <a:solidFill>
+                  <a:srgbClr val="333333"/>
+                </a:solidFill>
+              </a:defRPr>
+            </a:pPr>
+            <a:r>
+              <a:t>The input() Function:</a:t>
+            </a:r>
+          </a:p>
+          <a:p>
+            <a:pPr>
+              <a:spcAft>
+                <a:spcPts val="600"/>
+              </a:spcAft>
+              <a:defRPr b="1" sz="2000">
+                <a:solidFill>
+                  <a:srgbClr val="333333"/>
+                </a:solidFill>
+              </a:defRPr>
+            </a:pPr>
+            <a:r>
+              <a:t>name = input("Enter your name: ")</a:t>
+            </a:r>
+          </a:p>
+          <a:p>
+            <a:pPr>
+              <a:spcAft>
+                <a:spcPts val="600"/>
+              </a:spcAft>
+              <a:defRPr b="1" sz="2000">
+                <a:solidFill>
+                  <a:srgbClr val="333333"/>
+                </a:solidFill>
+              </a:defRPr>
+            </a:pPr>
+            <a:r>
+              <a:t>How it Works:</a:t>
+            </a:r>
+          </a:p>
+          <a:p>
+            <a:pPr>
+              <a:spcAft>
+                <a:spcPts val="600"/>
+              </a:spcAft>
+              <a:defRPr sz="1600">
+                <a:solidFill>
+                  <a:srgbClr val="333333"/>
+                </a:solidFill>
+              </a:defRPr>
+            </a:pPr>
+            <a:r>
+              <a:t>1. Displays prompt to user</a:t>
+            </a:r>
+          </a:p>
+          <a:p>
+            <a:pPr>
+              <a:spcAft>
+                <a:spcPts val="600"/>
+              </a:spcAft>
+              <a:defRPr sz="1600">
+                <a:solidFill>
+                  <a:srgbClr val="333333"/>
+                </a:solidFill>
+              </a:defRPr>
+            </a:pPr>
+            <a:r>
+              <a:t>2. Waits for user to type and press Enter</a:t>
+            </a:r>
+          </a:p>
+          <a:p>
+            <a:pPr>
+              <a:spcAft>
+                <a:spcPts val="600"/>
+              </a:spcAft>
+              <a:defRPr sz="1600">
+                <a:solidFill>
+                  <a:srgbClr val="333333"/>
+                </a:solidFill>
+              </a:defRPr>
+            </a:pPr>
+            <a:r>
+              <a:t>3. Returns what user typed as a string</a:t>
+            </a:r>
+          </a:p>
+          <a:p>
+            <a:pPr>
+              <a:spcAft>
+                <a:spcPts val="600"/>
+              </a:spcAft>
+              <a:defRPr sz="1600">
+                <a:solidFill>
+                  <a:srgbClr val="333333"/>
+                </a:solidFill>
+              </a:defRPr>
+            </a:pPr>
+            <a:r>
+              <a:t>4. Stores result in variable</a:t>
+            </a:r>
+          </a:p>
+          <a:p>
+            <a:pPr>
+              <a:spcAft>
+                <a:spcPts val="600"/>
+              </a:spcAft>
+              <a:defRPr b="1" sz="2000">
+                <a:solidFill>
+                  <a:srgbClr val="333333"/>
+                </a:solidFill>
+              </a:defRPr>
+            </a:pPr>
+            <a:r>
+              <a:t>Important: input() Always Returns a String</a:t>
+            </a:r>
+          </a:p>
+          <a:p>
+            <a:pPr>
+              <a:spcAft>
+                <a:spcPts val="600"/>
+              </a:spcAft>
+              <a:defRPr b="1" sz="2000">
+                <a:solidFill>
+                  <a:srgbClr val="333333"/>
+                </a:solidFill>
+              </a:defRPr>
+            </a:pPr>
+            <a:r>
+              <a:t>age = input("Age: ")  # age is "25", not 25</a:t>
+            </a:r>
+          </a:p>
+          <a:p>
+            <a:pPr>
+              <a:spcAft>
+                <a:spcPts val="600"/>
+              </a:spcAft>
+              <a:defRPr b="1" sz="2000">
+                <a:solidFill>
+                  <a:srgbClr val="333333"/>
+                </a:solidFill>
+              </a:defRPr>
+            </a:pPr>
+            <a:r>
+              <a:t>Creating Interactive Programs:</a:t>
+            </a:r>
+          </a:p>
+          <a:p>
+            <a:pPr>
+              <a:spcAft>
+                <a:spcPts val="600"/>
+              </a:spcAft>
+              <a:defRPr sz="1600">
+                <a:solidFill>
+                  <a:srgbClr val="333333"/>
+                </a:solidFill>
+              </a:defRPr>
+            </a:pPr>
+            <a:r>
+              <a:t>name = input("What is your name? ")</a:t>
+            </a:r>
+          </a:p>
+          <a:p>
+            <a:pPr>
+              <a:spcAft>
+                <a:spcPts val="600"/>
+              </a:spcAft>
+              <a:defRPr sz="1600">
+                <a:solidFill>
+                  <a:srgbClr val="333333"/>
+                </a:solidFill>
+              </a:defRPr>
+            </a:pPr>
+            <a:r>
+              <a:t>print("Hello,", name)</a:t>
+            </a:r>
+          </a:p>
+          <a:p>
+            <a:pPr>
+              <a:spcAft>
+                <a:spcPts val="600"/>
+              </a:spcAft>
+              <a:defRPr b="1" sz="2000">
+                <a:solidFill>
+                  <a:srgbClr val="333333"/>
+                </a:solidFill>
+              </a:defRPr>
+            </a:pPr>
+            <a:r>
+              <a:t>Multiple Inputs:</a:t>
+            </a:r>
+          </a:p>
+          <a:p>
+            <a:pPr>
+              <a:spcAft>
+                <a:spcPts val="600"/>
+              </a:spcAft>
+              <a:defRPr b="1" sz="2000">
+                <a:solidFill>
+                  <a:srgbClr val="333333"/>
+                </a:solidFill>
+              </a:defRPr>
+            </a:pPr>
+            <a:r>
+              <a:t>first = input("First name: ")</a:t>
+            </a:r>
+          </a:p>
+          <a:p>
+            <a:pPr>
+              <a:spcAft>
+                <a:spcPts val="600"/>
+              </a:spcAft>
+              <a:defRPr b="1" sz="2000">
+                <a:solidFill>
+                  <a:srgbClr val="333333"/>
+                </a:solidFill>
+              </a:defRPr>
+            </a:pPr>
+            <a:r>
+              <a:t>last = input("Last name: ")</a:t>
+            </a:r>
+          </a:p>
+          <a:p>
+            <a:pPr>
+              <a:spcAft>
+                <a:spcPts val="600"/>
+              </a:spcAft>
+              <a:defRPr b="1" sz="2000">
+                <a:solidFill>
+                  <a:srgbClr val="333333"/>
+                </a:solidFill>
+              </a:defRPr>
+            </a:pPr>
+            <a:r>
+              <a:t>print(f"Full name: {first} {last}")</a:t>
             </a:r>
           </a:p>
         </p:txBody>
@@ -5084,7 +5829,7 @@
 </p:sld>
 </file>
 
-<file path=ppt/slides/slide8.xml><?xml version="1.0" encoding="utf-8"?>
+<file path=ppt/slides/slide3.xml><?xml version="1.0" encoding="utf-8"?>
 <p:sld xmlns:a="http://schemas.openxmlformats.org/drawingml/2006/main" xmlns:p="http://schemas.openxmlformats.org/presentationml/2006/main" xmlns:r="http://schemas.openxmlformats.org/officeDocument/2006/relationships">
   <p:cSld>
     <p:spTree>
@@ -5188,8 +5933,8 @@
         </p:nvSpPr>
         <p:spPr>
           <a:xfrm>
-            <a:off x="457200" y="365760"/>
-            <a:ext cx="10972800" cy="731520"/>
+            <a:off x="457200" y="320040"/>
+            <a:ext cx="10972800" cy="640080"/>
           </a:xfrm>
           <a:prstGeom prst="rect">
             <a:avLst/>
@@ -5203,71 +5948,28 @@
           <a:lstStyle/>
           <a:p>
             <a:pPr>
-              <a:defRPr sz="4000" b="1">
+              <a:defRPr sz="3600" b="1">
                 <a:solidFill>
                   <a:srgbClr val="003366"/>
                 </a:solidFill>
               </a:defRPr>
             </a:pPr>
             <a:r>
-              <a:t>Understanding Errors 🐛</a:t>
-            </a:r>
-          </a:p>
-        </p:txBody>
-      </p:sp>
-      <p:sp>
-        <p:nvSpPr>
-          <p:cNvPr id="5" name="Rectangle 4"/>
-          <p:cNvSpPr/>
+              <a:t>Type Conversion (Casting)</a:t>
+            </a:r>
+          </a:p>
+        </p:txBody>
+      </p:sp>
+      <p:sp>
+        <p:nvSpPr>
+          <p:cNvPr id="5" name="TextBox 4"/>
+          <p:cNvSpPr txBox="1"/>
           <p:nvPr/>
         </p:nvSpPr>
         <p:spPr>
           <a:xfrm>
-            <a:off x="457200" y="1005840"/>
-            <a:ext cx="1828800" cy="45720"/>
-          </a:xfrm>
-          <a:prstGeom prst="rect">
-            <a:avLst/>
-          </a:prstGeom>
-          <a:solidFill>
-            <a:srgbClr val="0066CC"/>
-          </a:solidFill>
-          <a:ln>
-            <a:noFill/>
-          </a:ln>
-        </p:spPr>
-        <p:style>
-          <a:lnRef idx="1">
-            <a:schemeClr val="accent1"/>
-          </a:lnRef>
-          <a:fillRef idx="3">
-            <a:schemeClr val="accent1"/>
-          </a:fillRef>
-          <a:effectRef idx="2">
-            <a:schemeClr val="accent1"/>
-          </a:effectRef>
-          <a:fontRef idx="minor">
-            <a:schemeClr val="lt1"/>
-          </a:fontRef>
-        </p:style>
-        <p:txBody>
-          <a:bodyPr rtlCol="0" anchor="ctr"/>
-          <a:lstStyle/>
-          <a:p>
-            <a:pPr algn="ctr"/>
-          </a:p>
-        </p:txBody>
-      </p:sp>
-      <p:sp>
-        <p:nvSpPr>
-          <p:cNvPr id="6" name="TextBox 5"/>
-          <p:cNvSpPr txBox="1"/>
-          <p:nvPr/>
-        </p:nvSpPr>
-        <p:spPr>
-          <a:xfrm>
-            <a:off x="640080" y="1371600"/>
-            <a:ext cx="10789920" cy="4572000"/>
+            <a:off x="640080" y="1188720"/>
+            <a:ext cx="10789920" cy="5303520"/>
           </a:xfrm>
           <a:prstGeom prst="rect">
             <a:avLst/>
@@ -5282,121 +5984,241 @@
           <a:p>
             <a:pPr>
               <a:spcAft>
-                <a:spcPts val="800"/>
-              </a:spcAft>
-              <a:defRPr sz="2000" b="1">
-                <a:solidFill>
-                  <a:srgbClr val="333333"/>
-                </a:solidFill>
-              </a:defRPr>
-            </a:pPr>
-            <a:r>
-              <a:t>Errors are normal! They help you learn and fix problems.</a:t>
-            </a:r>
-          </a:p>
-          <a:p>
-            <a:pPr>
-              <a:spcAft>
-                <a:spcPts val="800"/>
-              </a:spcAft>
-              <a:defRPr sz="2000" b="1">
-                <a:solidFill>
-                  <a:srgbClr val="333333"/>
-                </a:solidFill>
-              </a:defRPr>
-            </a:pPr>
-            <a:r>
-              <a:t>ValueError</a:t>
-            </a:r>
-          </a:p>
-          <a:p>
-            <a:pPr>
-              <a:spcAft>
-                <a:spcPts val="800"/>
-              </a:spcAft>
-              <a:defRPr sz="2000" b="1">
-                <a:solidFill>
-                  <a:srgbClr val="333333"/>
-                </a:solidFill>
-              </a:defRPr>
-            </a:pPr>
-            <a:r>
-              <a:t>Trying to convert invalid text to number</a:t>
-            </a:r>
-          </a:p>
-          <a:p>
-            <a:pPr>
-              <a:spcAft>
-                <a:spcPts val="800"/>
-              </a:spcAft>
-              <a:defRPr sz="2000" b="1">
-                <a:solidFill>
-                  <a:srgbClr val="333333"/>
-                </a:solidFill>
-              </a:defRPr>
-            </a:pPr>
-            <a:r>
-              <a:t>TypeError</a:t>
-            </a:r>
-          </a:p>
-          <a:p>
-            <a:pPr>
-              <a:spcAft>
-                <a:spcPts val="800"/>
-              </a:spcAft>
-              <a:defRPr sz="2000" b="1">
-                <a:solidFill>
-                  <a:srgbClr val="333333"/>
-                </a:solidFill>
-              </a:defRPr>
-            </a:pPr>
-            <a:r>
-              <a:t>Mixing incompatible types</a:t>
-            </a:r>
-          </a:p>
-          <a:p>
-            <a:pPr>
-              <a:spcAft>
-                <a:spcPts val="800"/>
-              </a:spcAft>
-              <a:defRPr sz="2000" b="1">
-                <a:solidFill>
-                  <a:srgbClr val="333333"/>
-                </a:solidFill>
-              </a:defRPr>
-            </a:pPr>
-            <a:r>
-              <a:t>SyntaxError</a:t>
-            </a:r>
-          </a:p>
-          <a:p>
-            <a:pPr>
-              <a:spcAft>
-                <a:spcPts val="800"/>
-              </a:spcAft>
-              <a:defRPr sz="2000" b="1">
-                <a:solidFill>
-                  <a:srgbClr val="333333"/>
-                </a:solidFill>
-              </a:defRPr>
-            </a:pPr>
-            <a:r>
-              <a:t>Invalid Python syntax</a:t>
-            </a:r>
-          </a:p>
-          <a:p>
-            <a:pPr>
-              <a:spcAft>
-                <a:spcPts val="800"/>
-              </a:spcAft>
-              <a:defRPr sz="2000" b="1">
-                <a:solidFill>
-                  <a:srgbClr val="333333"/>
-                </a:solidFill>
-              </a:defRPr>
-            </a:pPr>
-            <a:r>
-              <a:t>💡 Tip:Read error messages carefully - they tell you what went wrong!</a:t>
+                <a:spcPts val="600"/>
+              </a:spcAft>
+              <a:defRPr b="1" sz="2000">
+                <a:solidFill>
+                  <a:srgbClr val="333333"/>
+                </a:solidFill>
+              </a:defRPr>
+            </a:pPr>
+            <a:r>
+              <a:t>Converting Between Data Types:</a:t>
+            </a:r>
+          </a:p>
+          <a:p>
+            <a:pPr>
+              <a:spcAft>
+                <a:spcPts val="600"/>
+              </a:spcAft>
+              <a:defRPr b="1" sz="2000">
+                <a:solidFill>
+                  <a:srgbClr val="333333"/>
+                </a:solidFill>
+              </a:defRPr>
+            </a:pPr>
+            <a:r>
+              <a:t>String to Integer:</a:t>
+            </a:r>
+          </a:p>
+          <a:p>
+            <a:pPr>
+              <a:spcAft>
+                <a:spcPts val="600"/>
+              </a:spcAft>
+              <a:defRPr sz="1600">
+                <a:solidFill>
+                  <a:srgbClr val="333333"/>
+                </a:solidFill>
+              </a:defRPr>
+            </a:pPr>
+            <a:r>
+              <a:t>age_str = "25"</a:t>
+            </a:r>
+          </a:p>
+          <a:p>
+            <a:pPr>
+              <a:spcAft>
+                <a:spcPts val="600"/>
+              </a:spcAft>
+              <a:defRPr sz="1600">
+                <a:solidFill>
+                  <a:srgbClr val="333333"/>
+                </a:solidFill>
+              </a:defRPr>
+            </a:pPr>
+            <a:r>
+              <a:t>age_int = int(age_str)  # 25</a:t>
+            </a:r>
+          </a:p>
+          <a:p>
+            <a:pPr>
+              <a:spcAft>
+                <a:spcPts val="600"/>
+              </a:spcAft>
+              <a:defRPr b="1" sz="2000">
+                <a:solidFill>
+                  <a:srgbClr val="333333"/>
+                </a:solidFill>
+              </a:defRPr>
+            </a:pPr>
+            <a:r>
+              <a:t>String to Float:</a:t>
+            </a:r>
+          </a:p>
+          <a:p>
+            <a:pPr>
+              <a:spcAft>
+                <a:spcPts val="600"/>
+              </a:spcAft>
+              <a:defRPr sz="1600">
+                <a:solidFill>
+                  <a:srgbClr val="333333"/>
+                </a:solidFill>
+              </a:defRPr>
+            </a:pPr>
+            <a:r>
+              <a:t>price_str = "19.99"</a:t>
+            </a:r>
+          </a:p>
+          <a:p>
+            <a:pPr>
+              <a:spcAft>
+                <a:spcPts val="600"/>
+              </a:spcAft>
+              <a:defRPr sz="1600">
+                <a:solidFill>
+                  <a:srgbClr val="333333"/>
+                </a:solidFill>
+              </a:defRPr>
+            </a:pPr>
+            <a:r>
+              <a:t>price_float = float(price_str)  # 19.99</a:t>
+            </a:r>
+          </a:p>
+          <a:p>
+            <a:pPr>
+              <a:spcAft>
+                <a:spcPts val="600"/>
+              </a:spcAft>
+              <a:defRPr b="1" sz="2000">
+                <a:solidFill>
+                  <a:srgbClr val="333333"/>
+                </a:solidFill>
+              </a:defRPr>
+            </a:pPr>
+            <a:r>
+              <a:t>Number to String:</a:t>
+            </a:r>
+          </a:p>
+          <a:p>
+            <a:pPr>
+              <a:spcAft>
+                <a:spcPts val="600"/>
+              </a:spcAft>
+              <a:defRPr sz="1600">
+                <a:solidFill>
+                  <a:srgbClr val="333333"/>
+                </a:solidFill>
+              </a:defRPr>
+            </a:pPr>
+            <a:r>
+              <a:t>age = 25</a:t>
+            </a:r>
+          </a:p>
+          <a:p>
+            <a:pPr>
+              <a:spcAft>
+                <a:spcPts val="600"/>
+              </a:spcAft>
+              <a:defRPr sz="1600">
+                <a:solidFill>
+                  <a:srgbClr val="333333"/>
+                </a:solidFill>
+              </a:defRPr>
+            </a:pPr>
+            <a:r>
+              <a:t>age_str = str(age)  # "25"</a:t>
+            </a:r>
+          </a:p>
+          <a:p>
+            <a:pPr>
+              <a:spcAft>
+                <a:spcPts val="600"/>
+              </a:spcAft>
+              <a:defRPr b="1" sz="2000">
+                <a:solidFill>
+                  <a:srgbClr val="333333"/>
+                </a:solidFill>
+              </a:defRPr>
+            </a:pPr>
+            <a:r>
+              <a:t>Converting User Input:</a:t>
+            </a:r>
+          </a:p>
+          <a:p>
+            <a:pPr>
+              <a:spcAft>
+                <a:spcPts val="600"/>
+              </a:spcAft>
+              <a:defRPr b="1" sz="2000">
+                <a:solidFill>
+                  <a:srgbClr val="333333"/>
+                </a:solidFill>
+              </a:defRPr>
+            </a:pPr>
+            <a:r>
+              <a:t>age = int(input("Enter age: "))</a:t>
+            </a:r>
+          </a:p>
+          <a:p>
+            <a:pPr>
+              <a:spcAft>
+                <a:spcPts val="600"/>
+              </a:spcAft>
+              <a:defRPr b="1" sz="2000">
+                <a:solidFill>
+                  <a:srgbClr val="333333"/>
+                </a:solidFill>
+              </a:defRPr>
+            </a:pPr>
+            <a:r>
+              <a:t>height = float(input("Enter height: "))</a:t>
+            </a:r>
+          </a:p>
+          <a:p>
+            <a:pPr>
+              <a:spcAft>
+                <a:spcPts val="600"/>
+              </a:spcAft>
+              <a:defRPr b="1" sz="2000">
+                <a:solidFill>
+                  <a:srgbClr val="333333"/>
+                </a:solidFill>
+              </a:defRPr>
+            </a:pPr>
+            <a:r>
+              <a:t>Common Pattern:</a:t>
+            </a:r>
+          </a:p>
+          <a:p>
+            <a:pPr>
+              <a:spcAft>
+                <a:spcPts val="600"/>
+              </a:spcAft>
+              <a:defRPr b="1" sz="2000">
+                <a:solidFill>
+                  <a:srgbClr val="333333"/>
+                </a:solidFill>
+              </a:defRPr>
+            </a:pPr>
+            <a:r>
+              <a:t>number = int(input("Enter number: "))</a:t>
+            </a:r>
+          </a:p>
+          <a:p>
+            <a:pPr>
+              <a:spcAft>
+                <a:spcPts val="600"/>
+              </a:spcAft>
+              <a:defRPr sz="1600">
+                <a:solidFill>
+                  <a:srgbClr val="333333"/>
+                </a:solidFill>
+              </a:defRPr>
+            </a:pPr>
+            <a:r>
+              <a:t>result = number * 2</a:t>
             </a:r>
           </a:p>
         </p:txBody>
@@ -5409,7 +6231,7 @@
 </p:sld>
 </file>
 
-<file path=ppt/slides/slide9.xml><?xml version="1.0" encoding="utf-8"?>
+<file path=ppt/slides/slide4.xml><?xml version="1.0" encoding="utf-8"?>
 <p:sld xmlns:a="http://schemas.openxmlformats.org/drawingml/2006/main" xmlns:p="http://schemas.openxmlformats.org/presentationml/2006/main" xmlns:r="http://schemas.openxmlformats.org/officeDocument/2006/relationships">
   <p:cSld>
     <p:spTree>
@@ -5513,8 +6335,8 @@
         </p:nvSpPr>
         <p:spPr>
           <a:xfrm>
-            <a:off x="457200" y="365760"/>
-            <a:ext cx="10972800" cy="731520"/>
+            <a:off x="457200" y="320040"/>
+            <a:ext cx="10972800" cy="640080"/>
           </a:xfrm>
           <a:prstGeom prst="rect">
             <a:avLst/>
@@ -5528,28 +6350,367 @@
           <a:lstStyle/>
           <a:p>
             <a:pPr>
-              <a:defRPr sz="4000" b="1">
+              <a:defRPr sz="3600" b="1">
                 <a:solidFill>
                   <a:srgbClr val="003366"/>
                 </a:solidFill>
               </a:defRPr>
             </a:pPr>
             <a:r>
-              <a:t>Interactive Program Example 🎮</a:t>
-            </a:r>
-          </a:p>
-        </p:txBody>
-      </p:sp>
-      <p:sp>
-        <p:nvSpPr>
-          <p:cNvPr id="5" name="Rectangle 4"/>
+              <a:t>String Indexing</a:t>
+            </a:r>
+          </a:p>
+        </p:txBody>
+      </p:sp>
+      <p:sp>
+        <p:nvSpPr>
+          <p:cNvPr id="5" name="TextBox 4"/>
+          <p:cNvSpPr txBox="1"/>
+          <p:nvPr/>
+        </p:nvSpPr>
+        <p:spPr>
+          <a:xfrm>
+            <a:off x="640080" y="1188720"/>
+            <a:ext cx="10789920" cy="5303520"/>
+          </a:xfrm>
+          <a:prstGeom prst="rect">
+            <a:avLst/>
+          </a:prstGeom>
+          <a:noFill/>
+        </p:spPr>
+        <p:txBody>
+          <a:bodyPr wrap="square">
+            <a:spAutoFit/>
+          </a:bodyPr>
+          <a:lstStyle/>
+          <a:p>
+            <a:pPr>
+              <a:spcAft>
+                <a:spcPts val="600"/>
+              </a:spcAft>
+              <a:defRPr b="1" sz="2000">
+                <a:solidFill>
+                  <a:srgbClr val="333333"/>
+                </a:solidFill>
+              </a:defRPr>
+            </a:pPr>
+            <a:r>
+              <a:t>Accessing Individual Characters:</a:t>
+            </a:r>
+          </a:p>
+          <a:p>
+            <a:pPr>
+              <a:spcAft>
+                <a:spcPts val="600"/>
+              </a:spcAft>
+              <a:defRPr sz="1600">
+                <a:solidFill>
+                  <a:srgbClr val="333333"/>
+                </a:solidFill>
+              </a:defRPr>
+            </a:pPr>
+            <a:r>
+              <a:t>text = "Python"</a:t>
+            </a:r>
+          </a:p>
+          <a:p>
+            <a:pPr>
+              <a:spcAft>
+                <a:spcPts val="600"/>
+              </a:spcAft>
+              <a:defRPr b="1" sz="2000">
+                <a:solidFill>
+                  <a:srgbClr val="333333"/>
+                </a:solidFill>
+              </a:defRPr>
+            </a:pPr>
+            <a:r>
+              <a:t>Positive Indexing (from start):</a:t>
+            </a:r>
+          </a:p>
+          <a:p>
+            <a:pPr>
+              <a:spcAft>
+                <a:spcPts val="600"/>
+              </a:spcAft>
+              <a:defRPr sz="1600">
+                <a:solidFill>
+                  <a:srgbClr val="333333"/>
+                </a:solidFill>
+              </a:defRPr>
+            </a:pPr>
+            <a:r>
+              <a:t>text[0]  # "P" (first character)</a:t>
+            </a:r>
+          </a:p>
+          <a:p>
+            <a:pPr>
+              <a:spcAft>
+                <a:spcPts val="600"/>
+              </a:spcAft>
+              <a:defRPr sz="1600">
+                <a:solidFill>
+                  <a:srgbClr val="333333"/>
+                </a:solidFill>
+              </a:defRPr>
+            </a:pPr>
+            <a:r>
+              <a:t>text[1]  # "y"</a:t>
+            </a:r>
+          </a:p>
+          <a:p>
+            <a:pPr>
+              <a:spcAft>
+                <a:spcPts val="600"/>
+              </a:spcAft>
+              <a:defRPr sz="1600">
+                <a:solidFill>
+                  <a:srgbClr val="333333"/>
+                </a:solidFill>
+              </a:defRPr>
+            </a:pPr>
+            <a:r>
+              <a:t>text[5]  # "n" (last character)</a:t>
+            </a:r>
+          </a:p>
+          <a:p>
+            <a:pPr>
+              <a:spcAft>
+                <a:spcPts val="600"/>
+              </a:spcAft>
+              <a:defRPr b="1" sz="2000">
+                <a:solidFill>
+                  <a:srgbClr val="333333"/>
+                </a:solidFill>
+              </a:defRPr>
+            </a:pPr>
+            <a:r>
+              <a:t>Negative Indexing (from end):</a:t>
+            </a:r>
+          </a:p>
+          <a:p>
+            <a:pPr>
+              <a:spcAft>
+                <a:spcPts val="600"/>
+              </a:spcAft>
+              <a:defRPr sz="1600">
+                <a:solidFill>
+                  <a:srgbClr val="333333"/>
+                </a:solidFill>
+              </a:defRPr>
+            </a:pPr>
+            <a:r>
+              <a:t>text[-1]  # "n" (last character)</a:t>
+            </a:r>
+          </a:p>
+          <a:p>
+            <a:pPr>
+              <a:spcAft>
+                <a:spcPts val="600"/>
+              </a:spcAft>
+              <a:defRPr sz="1600">
+                <a:solidFill>
+                  <a:srgbClr val="333333"/>
+                </a:solidFill>
+              </a:defRPr>
+            </a:pPr>
+            <a:r>
+              <a:t>text[-2]  # "o"</a:t>
+            </a:r>
+          </a:p>
+          <a:p>
+            <a:pPr>
+              <a:spcAft>
+                <a:spcPts val="600"/>
+              </a:spcAft>
+              <a:defRPr sz="1600">
+                <a:solidFill>
+                  <a:srgbClr val="333333"/>
+                </a:solidFill>
+              </a:defRPr>
+            </a:pPr>
+            <a:r>
+              <a:t>text[-6]  # "P" (first character)</a:t>
+            </a:r>
+          </a:p>
+          <a:p>
+            <a:pPr>
+              <a:spcAft>
+                <a:spcPts val="600"/>
+              </a:spcAft>
+              <a:defRPr b="1" sz="2000">
+                <a:solidFill>
+                  <a:srgbClr val="333333"/>
+                </a:solidFill>
+              </a:defRPr>
+            </a:pPr>
+            <a:r>
+              <a:t>Index Range:</a:t>
+            </a:r>
+          </a:p>
+          <a:p>
+            <a:pPr lvl="1">
+              <a:spcAft>
+                <a:spcPts val="400"/>
+              </a:spcAft>
+              <a:defRPr sz="1600">
+                <a:solidFill>
+                  <a:srgbClr val="333333"/>
+                </a:solidFill>
+              </a:defRPr>
+            </a:pPr>
+            <a:r>
+              <a:t>• Valid indices: 0 to length-1</a:t>
+            </a:r>
+          </a:p>
+          <a:p>
+            <a:pPr lvl="1">
+              <a:spcAft>
+                <a:spcPts val="400"/>
+              </a:spcAft>
+              <a:defRPr sz="1600">
+                <a:solidFill>
+                  <a:srgbClr val="333333"/>
+                </a:solidFill>
+              </a:defRPr>
+            </a:pPr>
+            <a:r>
+              <a:t>• Or: -length to -1</a:t>
+            </a:r>
+          </a:p>
+          <a:p>
+            <a:pPr>
+              <a:spcAft>
+                <a:spcPts val="600"/>
+              </a:spcAft>
+              <a:defRPr b="1" sz="2000">
+                <a:solidFill>
+                  <a:srgbClr val="333333"/>
+                </a:solidFill>
+              </a:defRPr>
+            </a:pPr>
+            <a:r>
+              <a:t>Length of String:</a:t>
+            </a:r>
+          </a:p>
+          <a:p>
+            <a:pPr>
+              <a:spcAft>
+                <a:spcPts val="600"/>
+              </a:spcAft>
+              <a:defRPr sz="1600">
+                <a:solidFill>
+                  <a:srgbClr val="333333"/>
+                </a:solidFill>
+              </a:defRPr>
+            </a:pPr>
+            <a:r>
+              <a:t>len(text)  # 6</a:t>
+            </a:r>
+          </a:p>
+          <a:p>
+            <a:pPr>
+              <a:spcAft>
+                <a:spcPts val="600"/>
+              </a:spcAft>
+              <a:defRPr b="1" sz="2000">
+                <a:solidFill>
+                  <a:srgbClr val="333333"/>
+                </a:solidFill>
+              </a:defRPr>
+            </a:pPr>
+            <a:r>
+              <a:t>Index Out of Range Error:</a:t>
+            </a:r>
+          </a:p>
+          <a:p>
+            <a:pPr>
+              <a:spcAft>
+                <a:spcPts val="600"/>
+              </a:spcAft>
+              <a:defRPr sz="1600">
+                <a:solidFill>
+                  <a:srgbClr val="333333"/>
+                </a:solidFill>
+              </a:defRPr>
+            </a:pPr>
+            <a:r>
+              <a:t>text[10]  # ERROR!</a:t>
+            </a:r>
+          </a:p>
+        </p:txBody>
+      </p:sp>
+    </p:spTree>
+  </p:cSld>
+  <p:clrMapOvr>
+    <a:masterClrMapping/>
+  </p:clrMapOvr>
+</p:sld>
+</file>
+
+<file path=ppt/slides/slide5.xml><?xml version="1.0" encoding="utf-8"?>
+<p:sld xmlns:a="http://schemas.openxmlformats.org/drawingml/2006/main" xmlns:p="http://schemas.openxmlformats.org/presentationml/2006/main" xmlns:r="http://schemas.openxmlformats.org/officeDocument/2006/relationships">
+  <p:cSld>
+    <p:spTree>
+      <p:nvGrpSpPr>
+        <p:cNvPr id="1" name=""/>
+        <p:cNvGrpSpPr/>
+        <p:nvPr/>
+      </p:nvGrpSpPr>
+      <p:grpSpPr/>
+      <p:sp>
+        <p:nvSpPr>
+          <p:cNvPr id="2" name="Rectangle 1"/>
           <p:cNvSpPr/>
           <p:nvPr/>
         </p:nvSpPr>
         <p:spPr>
           <a:xfrm>
-            <a:off x="457200" y="1005840"/>
-            <a:ext cx="1828800" cy="45720"/>
+            <a:off x="0" y="0"/>
+            <a:ext cx="12191695" cy="6858000"/>
+          </a:xfrm>
+          <a:prstGeom prst="rect">
+            <a:avLst/>
+          </a:prstGeom>
+          <a:solidFill>
+            <a:srgbClr val="FFFFFF"/>
+          </a:solidFill>
+          <a:ln>
+            <a:noFill/>
+          </a:ln>
+        </p:spPr>
+        <p:style>
+          <a:lnRef idx="1">
+            <a:schemeClr val="accent1"/>
+          </a:lnRef>
+          <a:fillRef idx="3">
+            <a:schemeClr val="accent1"/>
+          </a:fillRef>
+          <a:effectRef idx="2">
+            <a:schemeClr val="accent1"/>
+          </a:effectRef>
+          <a:fontRef idx="minor">
+            <a:schemeClr val="lt1"/>
+          </a:fontRef>
+        </p:style>
+        <p:txBody>
+          <a:bodyPr rtlCol="0" anchor="ctr"/>
+          <a:lstStyle/>
+          <a:p>
+            <a:pPr algn="ctr"/>
+          </a:p>
+        </p:txBody>
+      </p:sp>
+      <p:sp>
+        <p:nvSpPr>
+          <p:cNvPr id="3" name="Rectangle 2"/>
+          <p:cNvSpPr/>
+          <p:nvPr/>
+        </p:nvSpPr>
+        <p:spPr>
+          <a:xfrm>
+            <a:off x="0" y="0"/>
+            <a:ext cx="12191695" cy="137160"/>
           </a:xfrm>
           <a:prstGeom prst="rect">
             <a:avLst/>
@@ -5585,14 +6746,14 @@
       </p:sp>
       <p:sp>
         <p:nvSpPr>
-          <p:cNvPr id="6" name="TextBox 5"/>
+          <p:cNvPr id="4" name="TextBox 3"/>
           <p:cNvSpPr txBox="1"/>
           <p:nvPr/>
         </p:nvSpPr>
         <p:spPr>
           <a:xfrm>
-            <a:off x="640080" y="1371600"/>
-            <a:ext cx="10789920" cy="4572000"/>
+            <a:off x="457200" y="320040"/>
+            <a:ext cx="10972800" cy="640080"/>
           </a:xfrm>
           <a:prstGeom prst="rect">
             <a:avLst/>
@@ -5600,6 +6761,41 @@
           <a:noFill/>
         </p:spPr>
         <p:txBody>
+          <a:bodyPr wrap="none">
+            <a:spAutoFit/>
+          </a:bodyPr>
+          <a:lstStyle/>
+          <a:p>
+            <a:pPr>
+              <a:defRPr sz="3600" b="1">
+                <a:solidFill>
+                  <a:srgbClr val="003366"/>
+                </a:solidFill>
+              </a:defRPr>
+            </a:pPr>
+            <a:r>
+              <a:t>String Slicing</a:t>
+            </a:r>
+          </a:p>
+        </p:txBody>
+      </p:sp>
+      <p:sp>
+        <p:nvSpPr>
+          <p:cNvPr id="5" name="TextBox 4"/>
+          <p:cNvSpPr txBox="1"/>
+          <p:nvPr/>
+        </p:nvSpPr>
+        <p:spPr>
+          <a:xfrm>
+            <a:off x="640080" y="1188720"/>
+            <a:ext cx="10789920" cy="5303520"/>
+          </a:xfrm>
+          <a:prstGeom prst="rect">
+            <a:avLst/>
+          </a:prstGeom>
+          <a:noFill/>
+        </p:spPr>
+        <p:txBody>
           <a:bodyPr wrap="square">
             <a:spAutoFit/>
           </a:bodyPr>
@@ -5607,16 +6803,1939 @@
           <a:p>
             <a:pPr>
               <a:spcAft>
-                <a:spcPts val="800"/>
-              </a:spcAft>
-              <a:defRPr sz="2000" b="1">
-                <a:solidFill>
-                  <a:srgbClr val="333333"/>
-                </a:solidFill>
-              </a:defRPr>
-            </a:pPr>
-            <a:r>
-              <a:t>Personal Calculator</a:t>
+                <a:spcPts val="600"/>
+              </a:spcAft>
+              <a:defRPr b="1" sz="2000">
+                <a:solidFill>
+                  <a:srgbClr val="333333"/>
+                </a:solidFill>
+              </a:defRPr>
+            </a:pPr>
+            <a:r>
+              <a:t>Extracting Substrings:</a:t>
+            </a:r>
+          </a:p>
+          <a:p>
+            <a:pPr>
+              <a:spcAft>
+                <a:spcPts val="600"/>
+              </a:spcAft>
+              <a:defRPr sz="1600">
+                <a:solidFill>
+                  <a:srgbClr val="333333"/>
+                </a:solidFill>
+              </a:defRPr>
+            </a:pPr>
+            <a:r>
+              <a:t>text = "Python Programming"</a:t>
+            </a:r>
+          </a:p>
+          <a:p>
+            <a:pPr>
+              <a:spcAft>
+                <a:spcPts val="600"/>
+              </a:spcAft>
+              <a:defRPr b="1" sz="2000">
+                <a:solidFill>
+                  <a:srgbClr val="333333"/>
+                </a:solidFill>
+              </a:defRPr>
+            </a:pPr>
+            <a:r>
+              <a:t>Basic Slicing:</a:t>
+            </a:r>
+          </a:p>
+          <a:p>
+            <a:pPr>
+              <a:spcAft>
+                <a:spcPts val="600"/>
+              </a:spcAft>
+              <a:defRPr b="1" sz="2000">
+                <a:solidFill>
+                  <a:srgbClr val="333333"/>
+                </a:solidFill>
+              </a:defRPr>
+            </a:pPr>
+            <a:r>
+              <a:t>text[0:6]   # "Python"</a:t>
+            </a:r>
+          </a:p>
+          <a:p>
+            <a:pPr>
+              <a:spcAft>
+                <a:spcPts val="600"/>
+              </a:spcAft>
+              <a:defRPr b="1" sz="2000">
+                <a:solidFill>
+                  <a:srgbClr val="333333"/>
+                </a:solidFill>
+              </a:defRPr>
+            </a:pPr>
+            <a:r>
+              <a:t>text[7:18]  # "Programming"</a:t>
+            </a:r>
+          </a:p>
+          <a:p>
+            <a:pPr>
+              <a:spcAft>
+                <a:spcPts val="600"/>
+              </a:spcAft>
+              <a:defRPr b="1" sz="2000">
+                <a:solidFill>
+                  <a:srgbClr val="333333"/>
+                </a:solidFill>
+              </a:defRPr>
+            </a:pPr>
+            <a:r>
+              <a:t>Shorthand Forms:</a:t>
+            </a:r>
+          </a:p>
+          <a:p>
+            <a:pPr>
+              <a:spcAft>
+                <a:spcPts val="600"/>
+              </a:spcAft>
+              <a:defRPr b="1" sz="2000">
+                <a:solidFill>
+                  <a:srgbClr val="333333"/>
+                </a:solidFill>
+              </a:defRPr>
+            </a:pPr>
+            <a:r>
+              <a:t>text[:6]    # "Python" (start to 6)</a:t>
+            </a:r>
+          </a:p>
+          <a:p>
+            <a:pPr>
+              <a:spcAft>
+                <a:spcPts val="600"/>
+              </a:spcAft>
+              <a:defRPr b="1" sz="2000">
+                <a:solidFill>
+                  <a:srgbClr val="333333"/>
+                </a:solidFill>
+              </a:defRPr>
+            </a:pPr>
+            <a:r>
+              <a:t>text[7:]    # "Programming" (7 to end)</a:t>
+            </a:r>
+          </a:p>
+          <a:p>
+            <a:pPr>
+              <a:spcAft>
+                <a:spcPts val="600"/>
+              </a:spcAft>
+              <a:defRPr b="1" sz="2000">
+                <a:solidFill>
+                  <a:srgbClr val="333333"/>
+                </a:solidFill>
+              </a:defRPr>
+            </a:pPr>
+            <a:r>
+              <a:t>text[:]     # "Python Programming" (entire)</a:t>
+            </a:r>
+          </a:p>
+          <a:p>
+            <a:pPr>
+              <a:spcAft>
+                <a:spcPts val="600"/>
+              </a:spcAft>
+              <a:defRPr b="1" sz="2000">
+                <a:solidFill>
+                  <a:srgbClr val="333333"/>
+                </a:solidFill>
+              </a:defRPr>
+            </a:pPr>
+            <a:r>
+              <a:t>Step Parameter:</a:t>
+            </a:r>
+          </a:p>
+          <a:p>
+            <a:pPr>
+              <a:spcAft>
+                <a:spcPts val="600"/>
+              </a:spcAft>
+              <a:defRPr b="1" sz="2000">
+                <a:solidFill>
+                  <a:srgbClr val="333333"/>
+                </a:solidFill>
+              </a:defRPr>
+            </a:pPr>
+            <a:r>
+              <a:t>text[::2]   # "Pto rgamn" (every 2nd char)</a:t>
+            </a:r>
+          </a:p>
+          <a:p>
+            <a:pPr>
+              <a:spcAft>
+                <a:spcPts val="600"/>
+              </a:spcAft>
+              <a:defRPr b="1" sz="2000">
+                <a:solidFill>
+                  <a:srgbClr val="333333"/>
+                </a:solidFill>
+              </a:defRPr>
+            </a:pPr>
+            <a:r>
+              <a:t>text[::-1]  # "gnimmargorP nohtyP" (reversed)</a:t>
+            </a:r>
+          </a:p>
+          <a:p>
+            <a:pPr>
+              <a:spcAft>
+                <a:spcPts val="600"/>
+              </a:spcAft>
+              <a:defRPr b="1" sz="2000">
+                <a:solidFill>
+                  <a:srgbClr val="333333"/>
+                </a:solidFill>
+              </a:defRPr>
+            </a:pPr>
+            <a:r>
+              <a:t>Slicing Pattern:</a:t>
+            </a:r>
+          </a:p>
+          <a:p>
+            <a:pPr>
+              <a:spcAft>
+                <a:spcPts val="600"/>
+              </a:spcAft>
+              <a:defRPr b="1" sz="2000">
+                <a:solidFill>
+                  <a:srgbClr val="333333"/>
+                </a:solidFill>
+              </a:defRPr>
+            </a:pPr>
+            <a:r>
+              <a:t>string[start:end:step]</a:t>
+            </a:r>
+          </a:p>
+          <a:p>
+            <a:pPr lvl="1">
+              <a:spcAft>
+                <a:spcPts val="400"/>
+              </a:spcAft>
+              <a:defRPr sz="1600">
+                <a:solidFill>
+                  <a:srgbClr val="333333"/>
+                </a:solidFill>
+              </a:defRPr>
+            </a:pPr>
+            <a:r>
+              <a:t>• start: included</a:t>
+            </a:r>
+          </a:p>
+          <a:p>
+            <a:pPr lvl="1">
+              <a:spcAft>
+                <a:spcPts val="400"/>
+              </a:spcAft>
+              <a:defRPr sz="1600">
+                <a:solidFill>
+                  <a:srgbClr val="333333"/>
+                </a:solidFill>
+              </a:defRPr>
+            </a:pPr>
+            <a:r>
+              <a:t>• end: excluded</a:t>
+            </a:r>
+          </a:p>
+          <a:p>
+            <a:pPr lvl="1">
+              <a:spcAft>
+                <a:spcPts val="400"/>
+              </a:spcAft>
+              <a:defRPr sz="1600">
+                <a:solidFill>
+                  <a:srgbClr val="333333"/>
+                </a:solidFill>
+              </a:defRPr>
+            </a:pPr>
+            <a:r>
+              <a:t>• step: interval</a:t>
+            </a:r>
+          </a:p>
+        </p:txBody>
+      </p:sp>
+    </p:spTree>
+  </p:cSld>
+  <p:clrMapOvr>
+    <a:masterClrMapping/>
+  </p:clrMapOvr>
+</p:sld>
+</file>
+
+<file path=ppt/slides/slide6.xml><?xml version="1.0" encoding="utf-8"?>
+<p:sld xmlns:a="http://schemas.openxmlformats.org/drawingml/2006/main" xmlns:p="http://schemas.openxmlformats.org/presentationml/2006/main" xmlns:r="http://schemas.openxmlformats.org/officeDocument/2006/relationships">
+  <p:cSld>
+    <p:spTree>
+      <p:nvGrpSpPr>
+        <p:cNvPr id="1" name=""/>
+        <p:cNvGrpSpPr/>
+        <p:nvPr/>
+      </p:nvGrpSpPr>
+      <p:grpSpPr/>
+      <p:sp>
+        <p:nvSpPr>
+          <p:cNvPr id="2" name="Rectangle 1"/>
+          <p:cNvSpPr/>
+          <p:nvPr/>
+        </p:nvSpPr>
+        <p:spPr>
+          <a:xfrm>
+            <a:off x="0" y="0"/>
+            <a:ext cx="12191695" cy="6858000"/>
+          </a:xfrm>
+          <a:prstGeom prst="rect">
+            <a:avLst/>
+          </a:prstGeom>
+          <a:solidFill>
+            <a:srgbClr val="FFFFFF"/>
+          </a:solidFill>
+          <a:ln>
+            <a:noFill/>
+          </a:ln>
+        </p:spPr>
+        <p:style>
+          <a:lnRef idx="1">
+            <a:schemeClr val="accent1"/>
+          </a:lnRef>
+          <a:fillRef idx="3">
+            <a:schemeClr val="accent1"/>
+          </a:fillRef>
+          <a:effectRef idx="2">
+            <a:schemeClr val="accent1"/>
+          </a:effectRef>
+          <a:fontRef idx="minor">
+            <a:schemeClr val="lt1"/>
+          </a:fontRef>
+        </p:style>
+        <p:txBody>
+          <a:bodyPr rtlCol="0" anchor="ctr"/>
+          <a:lstStyle/>
+          <a:p>
+            <a:pPr algn="ctr"/>
+          </a:p>
+        </p:txBody>
+      </p:sp>
+      <p:sp>
+        <p:nvSpPr>
+          <p:cNvPr id="3" name="Rectangle 2"/>
+          <p:cNvSpPr/>
+          <p:nvPr/>
+        </p:nvSpPr>
+        <p:spPr>
+          <a:xfrm>
+            <a:off x="0" y="0"/>
+            <a:ext cx="12191695" cy="137160"/>
+          </a:xfrm>
+          <a:prstGeom prst="rect">
+            <a:avLst/>
+          </a:prstGeom>
+          <a:solidFill>
+            <a:srgbClr val="0066CC"/>
+          </a:solidFill>
+          <a:ln>
+            <a:noFill/>
+          </a:ln>
+        </p:spPr>
+        <p:style>
+          <a:lnRef idx="1">
+            <a:schemeClr val="accent1"/>
+          </a:lnRef>
+          <a:fillRef idx="3">
+            <a:schemeClr val="accent1"/>
+          </a:fillRef>
+          <a:effectRef idx="2">
+            <a:schemeClr val="accent1"/>
+          </a:effectRef>
+          <a:fontRef idx="minor">
+            <a:schemeClr val="lt1"/>
+          </a:fontRef>
+        </p:style>
+        <p:txBody>
+          <a:bodyPr rtlCol="0" anchor="ctr"/>
+          <a:lstStyle/>
+          <a:p>
+            <a:pPr algn="ctr"/>
+          </a:p>
+        </p:txBody>
+      </p:sp>
+      <p:sp>
+        <p:nvSpPr>
+          <p:cNvPr id="4" name="TextBox 3"/>
+          <p:cNvSpPr txBox="1"/>
+          <p:nvPr/>
+        </p:nvSpPr>
+        <p:spPr>
+          <a:xfrm>
+            <a:off x="457200" y="320040"/>
+            <a:ext cx="10972800" cy="640080"/>
+          </a:xfrm>
+          <a:prstGeom prst="rect">
+            <a:avLst/>
+          </a:prstGeom>
+          <a:noFill/>
+        </p:spPr>
+        <p:txBody>
+          <a:bodyPr wrap="none">
+            <a:spAutoFit/>
+          </a:bodyPr>
+          <a:lstStyle/>
+          <a:p>
+            <a:pPr>
+              <a:defRPr sz="3600" b="1">
+                <a:solidFill>
+                  <a:srgbClr val="003366"/>
+                </a:solidFill>
+              </a:defRPr>
+            </a:pPr>
+            <a:r>
+              <a:t>String Methods: Case Conversion</a:t>
+            </a:r>
+          </a:p>
+        </p:txBody>
+      </p:sp>
+      <p:sp>
+        <p:nvSpPr>
+          <p:cNvPr id="5" name="TextBox 4"/>
+          <p:cNvSpPr txBox="1"/>
+          <p:nvPr/>
+        </p:nvSpPr>
+        <p:spPr>
+          <a:xfrm>
+            <a:off x="640080" y="1188720"/>
+            <a:ext cx="10789920" cy="5303520"/>
+          </a:xfrm>
+          <a:prstGeom prst="rect">
+            <a:avLst/>
+          </a:prstGeom>
+          <a:noFill/>
+        </p:spPr>
+        <p:txBody>
+          <a:bodyPr wrap="square">
+            <a:spAutoFit/>
+          </a:bodyPr>
+          <a:lstStyle/>
+          <a:p>
+            <a:pPr>
+              <a:spcAft>
+                <a:spcPts val="600"/>
+              </a:spcAft>
+              <a:defRPr b="1" sz="2000">
+                <a:solidFill>
+                  <a:srgbClr val="333333"/>
+                </a:solidFill>
+              </a:defRPr>
+            </a:pPr>
+            <a:r>
+              <a:t>Changing Case:</a:t>
+            </a:r>
+          </a:p>
+          <a:p>
+            <a:pPr>
+              <a:spcAft>
+                <a:spcPts val="600"/>
+              </a:spcAft>
+              <a:defRPr sz="1600">
+                <a:solidFill>
+                  <a:srgbClr val="333333"/>
+                </a:solidFill>
+              </a:defRPr>
+            </a:pPr>
+            <a:r>
+              <a:t>text = "Python Programming"</a:t>
+            </a:r>
+          </a:p>
+          <a:p>
+            <a:pPr>
+              <a:spcAft>
+                <a:spcPts val="600"/>
+              </a:spcAft>
+              <a:defRPr sz="1600">
+                <a:solidFill>
+                  <a:srgbClr val="333333"/>
+                </a:solidFill>
+              </a:defRPr>
+            </a:pPr>
+            <a:r>
+              <a:t>text.upper()</a:t>
+            </a:r>
+          </a:p>
+          <a:p>
+            <a:pPr>
+              <a:spcAft>
+                <a:spcPts val="600"/>
+              </a:spcAft>
+              <a:defRPr sz="1600">
+                <a:solidFill>
+                  <a:srgbClr val="333333"/>
+                </a:solidFill>
+              </a:defRPr>
+            </a:pPr>
+            <a:r>
+              <a:t># "PYTHON PROGRAMMING"</a:t>
+            </a:r>
+          </a:p>
+          <a:p>
+            <a:pPr>
+              <a:spcAft>
+                <a:spcPts val="600"/>
+              </a:spcAft>
+              <a:defRPr sz="1600">
+                <a:solidFill>
+                  <a:srgbClr val="333333"/>
+                </a:solidFill>
+              </a:defRPr>
+            </a:pPr>
+            <a:r>
+              <a:t>text.lower()</a:t>
+            </a:r>
+          </a:p>
+          <a:p>
+            <a:pPr>
+              <a:spcAft>
+                <a:spcPts val="600"/>
+              </a:spcAft>
+              <a:defRPr sz="1600">
+                <a:solidFill>
+                  <a:srgbClr val="333333"/>
+                </a:solidFill>
+              </a:defRPr>
+            </a:pPr>
+            <a:r>
+              <a:t># "python programming"</a:t>
+            </a:r>
+          </a:p>
+          <a:p>
+            <a:pPr>
+              <a:spcAft>
+                <a:spcPts val="600"/>
+              </a:spcAft>
+              <a:defRPr sz="1600">
+                <a:solidFill>
+                  <a:srgbClr val="333333"/>
+                </a:solidFill>
+              </a:defRPr>
+            </a:pPr>
+            <a:r>
+              <a:t>text.title()</a:t>
+            </a:r>
+          </a:p>
+          <a:p>
+            <a:pPr>
+              <a:spcAft>
+                <a:spcPts val="600"/>
+              </a:spcAft>
+              <a:defRPr sz="1600">
+                <a:solidFill>
+                  <a:srgbClr val="333333"/>
+                </a:solidFill>
+              </a:defRPr>
+            </a:pPr>
+            <a:r>
+              <a:t># "Python Programming"</a:t>
+            </a:r>
+          </a:p>
+          <a:p>
+            <a:pPr>
+              <a:spcAft>
+                <a:spcPts val="600"/>
+              </a:spcAft>
+              <a:defRPr sz="1600">
+                <a:solidFill>
+                  <a:srgbClr val="333333"/>
+                </a:solidFill>
+              </a:defRPr>
+            </a:pPr>
+            <a:r>
+              <a:t>text.capitalize()</a:t>
+            </a:r>
+          </a:p>
+          <a:p>
+            <a:pPr>
+              <a:spcAft>
+                <a:spcPts val="600"/>
+              </a:spcAft>
+              <a:defRPr sz="1600">
+                <a:solidFill>
+                  <a:srgbClr val="333333"/>
+                </a:solidFill>
+              </a:defRPr>
+            </a:pPr>
+            <a:r>
+              <a:t># "Python programming"</a:t>
+            </a:r>
+          </a:p>
+          <a:p>
+            <a:pPr>
+              <a:spcAft>
+                <a:spcPts val="600"/>
+              </a:spcAft>
+              <a:defRPr sz="1600">
+                <a:solidFill>
+                  <a:srgbClr val="333333"/>
+                </a:solidFill>
+              </a:defRPr>
+            </a:pPr>
+            <a:r>
+              <a:t>text.swapcase()</a:t>
+            </a:r>
+          </a:p>
+          <a:p>
+            <a:pPr>
+              <a:spcAft>
+                <a:spcPts val="600"/>
+              </a:spcAft>
+              <a:defRPr sz="1600">
+                <a:solidFill>
+                  <a:srgbClr val="333333"/>
+                </a:solidFill>
+              </a:defRPr>
+            </a:pPr>
+            <a:r>
+              <a:t># "pYTHON pROGRAMMING"</a:t>
+            </a:r>
+          </a:p>
+          <a:p>
+            <a:pPr>
+              <a:spcAft>
+                <a:spcPts val="600"/>
+              </a:spcAft>
+              <a:defRPr b="1" sz="2000">
+                <a:solidFill>
+                  <a:srgbClr val="333333"/>
+                </a:solidFill>
+              </a:defRPr>
+            </a:pPr>
+            <a:r>
+              <a:t>Practical Use:</a:t>
+            </a:r>
+          </a:p>
+          <a:p>
+            <a:pPr>
+              <a:spcAft>
+                <a:spcPts val="600"/>
+              </a:spcAft>
+              <a:defRPr b="1" sz="2000">
+                <a:solidFill>
+                  <a:srgbClr val="333333"/>
+                </a:solidFill>
+              </a:defRPr>
+            </a:pPr>
+            <a:r>
+              <a:t>name = input("Name: ").title()</a:t>
+            </a:r>
+          </a:p>
+          <a:p>
+            <a:pPr>
+              <a:spcAft>
+                <a:spcPts val="600"/>
+              </a:spcAft>
+              <a:defRPr b="1" sz="2000">
+                <a:solidFill>
+                  <a:srgbClr val="333333"/>
+                </a:solidFill>
+              </a:defRPr>
+            </a:pPr>
+            <a:r>
+              <a:t>command = input("Command: ").lower()</a:t>
+            </a:r>
+          </a:p>
+          <a:p>
+            <a:pPr>
+              <a:spcAft>
+                <a:spcPts val="600"/>
+              </a:spcAft>
+              <a:defRPr b="1" sz="2000">
+                <a:solidFill>
+                  <a:srgbClr val="333333"/>
+                </a:solidFill>
+              </a:defRPr>
+            </a:pPr>
+            <a:r>
+              <a:t>Case-Insensitive Comparison:</a:t>
+            </a:r>
+          </a:p>
+          <a:p>
+            <a:pPr>
+              <a:spcAft>
+                <a:spcPts val="600"/>
+              </a:spcAft>
+              <a:defRPr b="1" sz="2000">
+                <a:solidFill>
+                  <a:srgbClr val="333333"/>
+                </a:solidFill>
+              </a:defRPr>
+            </a:pPr>
+            <a:r>
+              <a:t>if user_input.lower() == "yes":</a:t>
+            </a:r>
+          </a:p>
+        </p:txBody>
+      </p:sp>
+    </p:spTree>
+  </p:cSld>
+  <p:clrMapOvr>
+    <a:masterClrMapping/>
+  </p:clrMapOvr>
+</p:sld>
+</file>
+
+<file path=ppt/slides/slide7.xml><?xml version="1.0" encoding="utf-8"?>
+<p:sld xmlns:a="http://schemas.openxmlformats.org/drawingml/2006/main" xmlns:p="http://schemas.openxmlformats.org/presentationml/2006/main" xmlns:r="http://schemas.openxmlformats.org/officeDocument/2006/relationships">
+  <p:cSld>
+    <p:spTree>
+      <p:nvGrpSpPr>
+        <p:cNvPr id="1" name=""/>
+        <p:cNvGrpSpPr/>
+        <p:nvPr/>
+      </p:nvGrpSpPr>
+      <p:grpSpPr/>
+      <p:sp>
+        <p:nvSpPr>
+          <p:cNvPr id="2" name="Rectangle 1"/>
+          <p:cNvSpPr/>
+          <p:nvPr/>
+        </p:nvSpPr>
+        <p:spPr>
+          <a:xfrm>
+            <a:off x="0" y="0"/>
+            <a:ext cx="12191695" cy="6858000"/>
+          </a:xfrm>
+          <a:prstGeom prst="rect">
+            <a:avLst/>
+          </a:prstGeom>
+          <a:solidFill>
+            <a:srgbClr val="FFFFFF"/>
+          </a:solidFill>
+          <a:ln>
+            <a:noFill/>
+          </a:ln>
+        </p:spPr>
+        <p:style>
+          <a:lnRef idx="1">
+            <a:schemeClr val="accent1"/>
+          </a:lnRef>
+          <a:fillRef idx="3">
+            <a:schemeClr val="accent1"/>
+          </a:fillRef>
+          <a:effectRef idx="2">
+            <a:schemeClr val="accent1"/>
+          </a:effectRef>
+          <a:fontRef idx="minor">
+            <a:schemeClr val="lt1"/>
+          </a:fontRef>
+        </p:style>
+        <p:txBody>
+          <a:bodyPr rtlCol="0" anchor="ctr"/>
+          <a:lstStyle/>
+          <a:p>
+            <a:pPr algn="ctr"/>
+          </a:p>
+        </p:txBody>
+      </p:sp>
+      <p:sp>
+        <p:nvSpPr>
+          <p:cNvPr id="3" name="Rectangle 2"/>
+          <p:cNvSpPr/>
+          <p:nvPr/>
+        </p:nvSpPr>
+        <p:spPr>
+          <a:xfrm>
+            <a:off x="0" y="0"/>
+            <a:ext cx="12191695" cy="137160"/>
+          </a:xfrm>
+          <a:prstGeom prst="rect">
+            <a:avLst/>
+          </a:prstGeom>
+          <a:solidFill>
+            <a:srgbClr val="0066CC"/>
+          </a:solidFill>
+          <a:ln>
+            <a:noFill/>
+          </a:ln>
+        </p:spPr>
+        <p:style>
+          <a:lnRef idx="1">
+            <a:schemeClr val="accent1"/>
+          </a:lnRef>
+          <a:fillRef idx="3">
+            <a:schemeClr val="accent1"/>
+          </a:fillRef>
+          <a:effectRef idx="2">
+            <a:schemeClr val="accent1"/>
+          </a:effectRef>
+          <a:fontRef idx="minor">
+            <a:schemeClr val="lt1"/>
+          </a:fontRef>
+        </p:style>
+        <p:txBody>
+          <a:bodyPr rtlCol="0" anchor="ctr"/>
+          <a:lstStyle/>
+          <a:p>
+            <a:pPr algn="ctr"/>
+          </a:p>
+        </p:txBody>
+      </p:sp>
+      <p:sp>
+        <p:nvSpPr>
+          <p:cNvPr id="4" name="TextBox 3"/>
+          <p:cNvSpPr txBox="1"/>
+          <p:nvPr/>
+        </p:nvSpPr>
+        <p:spPr>
+          <a:xfrm>
+            <a:off x="457200" y="320040"/>
+            <a:ext cx="10972800" cy="640080"/>
+          </a:xfrm>
+          <a:prstGeom prst="rect">
+            <a:avLst/>
+          </a:prstGeom>
+          <a:noFill/>
+        </p:spPr>
+        <p:txBody>
+          <a:bodyPr wrap="none">
+            <a:spAutoFit/>
+          </a:bodyPr>
+          <a:lstStyle/>
+          <a:p>
+            <a:pPr>
+              <a:defRPr sz="3600" b="1">
+                <a:solidFill>
+                  <a:srgbClr val="003366"/>
+                </a:solidFill>
+              </a:defRPr>
+            </a:pPr>
+            <a:r>
+              <a:t>String Methods: Whitespace</a:t>
+            </a:r>
+          </a:p>
+        </p:txBody>
+      </p:sp>
+      <p:sp>
+        <p:nvSpPr>
+          <p:cNvPr id="5" name="TextBox 4"/>
+          <p:cNvSpPr txBox="1"/>
+          <p:nvPr/>
+        </p:nvSpPr>
+        <p:spPr>
+          <a:xfrm>
+            <a:off x="640080" y="1188720"/>
+            <a:ext cx="10789920" cy="5303520"/>
+          </a:xfrm>
+          <a:prstGeom prst="rect">
+            <a:avLst/>
+          </a:prstGeom>
+          <a:noFill/>
+        </p:spPr>
+        <p:txBody>
+          <a:bodyPr wrap="square">
+            <a:spAutoFit/>
+          </a:bodyPr>
+          <a:lstStyle/>
+          <a:p>
+            <a:pPr>
+              <a:spcAft>
+                <a:spcPts val="600"/>
+              </a:spcAft>
+              <a:defRPr b="1" sz="2000">
+                <a:solidFill>
+                  <a:srgbClr val="333333"/>
+                </a:solidFill>
+              </a:defRPr>
+            </a:pPr>
+            <a:r>
+              <a:t>Removing Whitespace:</a:t>
+            </a:r>
+          </a:p>
+          <a:p>
+            <a:pPr>
+              <a:spcAft>
+                <a:spcPts val="600"/>
+              </a:spcAft>
+              <a:defRPr sz="1600">
+                <a:solidFill>
+                  <a:srgbClr val="333333"/>
+                </a:solidFill>
+              </a:defRPr>
+            </a:pPr>
+            <a:r>
+              <a:t>text = "  Python  "</a:t>
+            </a:r>
+          </a:p>
+          <a:p>
+            <a:pPr>
+              <a:spcAft>
+                <a:spcPts val="600"/>
+              </a:spcAft>
+              <a:defRPr sz="1600">
+                <a:solidFill>
+                  <a:srgbClr val="333333"/>
+                </a:solidFill>
+              </a:defRPr>
+            </a:pPr>
+            <a:r>
+              <a:t>text.strip()</a:t>
+            </a:r>
+          </a:p>
+          <a:p>
+            <a:pPr>
+              <a:spcAft>
+                <a:spcPts val="600"/>
+              </a:spcAft>
+              <a:defRPr sz="1600">
+                <a:solidFill>
+                  <a:srgbClr val="333333"/>
+                </a:solidFill>
+              </a:defRPr>
+            </a:pPr>
+            <a:r>
+              <a:t># "Python" (both ends)</a:t>
+            </a:r>
+          </a:p>
+          <a:p>
+            <a:pPr>
+              <a:spcAft>
+                <a:spcPts val="600"/>
+              </a:spcAft>
+              <a:defRPr sz="1600">
+                <a:solidFill>
+                  <a:srgbClr val="333333"/>
+                </a:solidFill>
+              </a:defRPr>
+            </a:pPr>
+            <a:r>
+              <a:t>text.lstrip()</a:t>
+            </a:r>
+          </a:p>
+          <a:p>
+            <a:pPr>
+              <a:spcAft>
+                <a:spcPts val="600"/>
+              </a:spcAft>
+              <a:defRPr sz="1600">
+                <a:solidFill>
+                  <a:srgbClr val="333333"/>
+                </a:solidFill>
+              </a:defRPr>
+            </a:pPr>
+            <a:r>
+              <a:t># "Python  " (left side)</a:t>
+            </a:r>
+          </a:p>
+          <a:p>
+            <a:pPr>
+              <a:spcAft>
+                <a:spcPts val="600"/>
+              </a:spcAft>
+              <a:defRPr sz="1600">
+                <a:solidFill>
+                  <a:srgbClr val="333333"/>
+                </a:solidFill>
+              </a:defRPr>
+            </a:pPr>
+            <a:r>
+              <a:t>text.rstrip()</a:t>
+            </a:r>
+          </a:p>
+          <a:p>
+            <a:pPr>
+              <a:spcAft>
+                <a:spcPts val="600"/>
+              </a:spcAft>
+              <a:defRPr sz="1600">
+                <a:solidFill>
+                  <a:srgbClr val="333333"/>
+                </a:solidFill>
+              </a:defRPr>
+            </a:pPr>
+            <a:r>
+              <a:t># "  Python" (right side)</a:t>
+            </a:r>
+          </a:p>
+          <a:p>
+            <a:pPr>
+              <a:spcAft>
+                <a:spcPts val="600"/>
+              </a:spcAft>
+              <a:defRPr b="1" sz="2000">
+                <a:solidFill>
+                  <a:srgbClr val="333333"/>
+                </a:solidFill>
+              </a:defRPr>
+            </a:pPr>
+            <a:r>
+              <a:t>Why This Matters:</a:t>
+            </a:r>
+          </a:p>
+          <a:p>
+            <a:pPr>
+              <a:spcAft>
+                <a:spcPts val="600"/>
+              </a:spcAft>
+              <a:defRPr b="1" sz="2000">
+                <a:solidFill>
+                  <a:srgbClr val="333333"/>
+                </a:solidFill>
+              </a:defRPr>
+            </a:pPr>
+            <a:r>
+              <a:t>name = input("Name: ").strip()</a:t>
+            </a:r>
+          </a:p>
+          <a:p>
+            <a:pPr>
+              <a:spcAft>
+                <a:spcPts val="600"/>
+              </a:spcAft>
+              <a:defRPr sz="1600">
+                <a:solidFill>
+                  <a:srgbClr val="333333"/>
+                </a:solidFill>
+              </a:defRPr>
+            </a:pPr>
+            <a:r>
+              <a:t># Removes accidental spaces</a:t>
+            </a:r>
+          </a:p>
+          <a:p>
+            <a:pPr>
+              <a:spcAft>
+                <a:spcPts val="600"/>
+              </a:spcAft>
+              <a:defRPr b="1" sz="2000">
+                <a:solidFill>
+                  <a:srgbClr val="333333"/>
+                </a:solidFill>
+              </a:defRPr>
+            </a:pPr>
+            <a:r>
+              <a:t>Removing Specific Characters:</a:t>
+            </a:r>
+          </a:p>
+          <a:p>
+            <a:pPr>
+              <a:spcAft>
+                <a:spcPts val="600"/>
+              </a:spcAft>
+              <a:defRPr sz="1600">
+                <a:solidFill>
+                  <a:srgbClr val="333333"/>
+                </a:solidFill>
+              </a:defRPr>
+            </a:pPr>
+            <a:r>
+              <a:t>text = "***Python***"</a:t>
+            </a:r>
+          </a:p>
+          <a:p>
+            <a:pPr>
+              <a:spcAft>
+                <a:spcPts val="600"/>
+              </a:spcAft>
+              <a:defRPr sz="1600">
+                <a:solidFill>
+                  <a:srgbClr val="333333"/>
+                </a:solidFill>
+              </a:defRPr>
+            </a:pPr>
+            <a:r>
+              <a:t>text.strip("*")  # "Python"</a:t>
+            </a:r>
+          </a:p>
+          <a:p>
+            <a:pPr>
+              <a:spcAft>
+                <a:spcPts val="600"/>
+              </a:spcAft>
+              <a:defRPr b="1" sz="2000">
+                <a:solidFill>
+                  <a:srgbClr val="333333"/>
+                </a:solidFill>
+              </a:defRPr>
+            </a:pPr>
+            <a:r>
+              <a:t>Common Pattern:</a:t>
+            </a:r>
+          </a:p>
+          <a:p>
+            <a:pPr>
+              <a:spcAft>
+                <a:spcPts val="600"/>
+              </a:spcAft>
+              <a:defRPr b="1" sz="2000">
+                <a:solidFill>
+                  <a:srgbClr val="333333"/>
+                </a:solidFill>
+              </a:defRPr>
+            </a:pPr>
+            <a:r>
+              <a:t>user_input = input("Enter: ").strip().lower()</a:t>
+            </a:r>
+          </a:p>
+        </p:txBody>
+      </p:sp>
+    </p:spTree>
+  </p:cSld>
+  <p:clrMapOvr>
+    <a:masterClrMapping/>
+  </p:clrMapOvr>
+</p:sld>
+</file>
+
+<file path=ppt/slides/slide8.xml><?xml version="1.0" encoding="utf-8"?>
+<p:sld xmlns:a="http://schemas.openxmlformats.org/drawingml/2006/main" xmlns:p="http://schemas.openxmlformats.org/presentationml/2006/main" xmlns:r="http://schemas.openxmlformats.org/officeDocument/2006/relationships">
+  <p:cSld>
+    <p:spTree>
+      <p:nvGrpSpPr>
+        <p:cNvPr id="1" name=""/>
+        <p:cNvGrpSpPr/>
+        <p:nvPr/>
+      </p:nvGrpSpPr>
+      <p:grpSpPr/>
+      <p:sp>
+        <p:nvSpPr>
+          <p:cNvPr id="2" name="Rectangle 1"/>
+          <p:cNvSpPr/>
+          <p:nvPr/>
+        </p:nvSpPr>
+        <p:spPr>
+          <a:xfrm>
+            <a:off x="0" y="0"/>
+            <a:ext cx="12191695" cy="6858000"/>
+          </a:xfrm>
+          <a:prstGeom prst="rect">
+            <a:avLst/>
+          </a:prstGeom>
+          <a:solidFill>
+            <a:srgbClr val="FFFFFF"/>
+          </a:solidFill>
+          <a:ln>
+            <a:noFill/>
+          </a:ln>
+        </p:spPr>
+        <p:style>
+          <a:lnRef idx="1">
+            <a:schemeClr val="accent1"/>
+          </a:lnRef>
+          <a:fillRef idx="3">
+            <a:schemeClr val="accent1"/>
+          </a:fillRef>
+          <a:effectRef idx="2">
+            <a:schemeClr val="accent1"/>
+          </a:effectRef>
+          <a:fontRef idx="minor">
+            <a:schemeClr val="lt1"/>
+          </a:fontRef>
+        </p:style>
+        <p:txBody>
+          <a:bodyPr rtlCol="0" anchor="ctr"/>
+          <a:lstStyle/>
+          <a:p>
+            <a:pPr algn="ctr"/>
+          </a:p>
+        </p:txBody>
+      </p:sp>
+      <p:sp>
+        <p:nvSpPr>
+          <p:cNvPr id="3" name="Rectangle 2"/>
+          <p:cNvSpPr/>
+          <p:nvPr/>
+        </p:nvSpPr>
+        <p:spPr>
+          <a:xfrm>
+            <a:off x="0" y="0"/>
+            <a:ext cx="12191695" cy="137160"/>
+          </a:xfrm>
+          <a:prstGeom prst="rect">
+            <a:avLst/>
+          </a:prstGeom>
+          <a:solidFill>
+            <a:srgbClr val="0066CC"/>
+          </a:solidFill>
+          <a:ln>
+            <a:noFill/>
+          </a:ln>
+        </p:spPr>
+        <p:style>
+          <a:lnRef idx="1">
+            <a:schemeClr val="accent1"/>
+          </a:lnRef>
+          <a:fillRef idx="3">
+            <a:schemeClr val="accent1"/>
+          </a:fillRef>
+          <a:effectRef idx="2">
+            <a:schemeClr val="accent1"/>
+          </a:effectRef>
+          <a:fontRef idx="minor">
+            <a:schemeClr val="lt1"/>
+          </a:fontRef>
+        </p:style>
+        <p:txBody>
+          <a:bodyPr rtlCol="0" anchor="ctr"/>
+          <a:lstStyle/>
+          <a:p>
+            <a:pPr algn="ctr"/>
+          </a:p>
+        </p:txBody>
+      </p:sp>
+      <p:sp>
+        <p:nvSpPr>
+          <p:cNvPr id="4" name="TextBox 3"/>
+          <p:cNvSpPr txBox="1"/>
+          <p:nvPr/>
+        </p:nvSpPr>
+        <p:spPr>
+          <a:xfrm>
+            <a:off x="457200" y="320040"/>
+            <a:ext cx="10972800" cy="640080"/>
+          </a:xfrm>
+          <a:prstGeom prst="rect">
+            <a:avLst/>
+          </a:prstGeom>
+          <a:noFill/>
+        </p:spPr>
+        <p:txBody>
+          <a:bodyPr wrap="none">
+            <a:spAutoFit/>
+          </a:bodyPr>
+          <a:lstStyle/>
+          <a:p>
+            <a:pPr>
+              <a:defRPr sz="3600" b="1">
+                <a:solidFill>
+                  <a:srgbClr val="003366"/>
+                </a:solidFill>
+              </a:defRPr>
+            </a:pPr>
+            <a:r>
+              <a:t>String Methods: Search and Replace</a:t>
+            </a:r>
+          </a:p>
+        </p:txBody>
+      </p:sp>
+      <p:sp>
+        <p:nvSpPr>
+          <p:cNvPr id="5" name="TextBox 4"/>
+          <p:cNvSpPr txBox="1"/>
+          <p:nvPr/>
+        </p:nvSpPr>
+        <p:spPr>
+          <a:xfrm>
+            <a:off x="640080" y="1188720"/>
+            <a:ext cx="10789920" cy="5303520"/>
+          </a:xfrm>
+          <a:prstGeom prst="rect">
+            <a:avLst/>
+          </a:prstGeom>
+          <a:noFill/>
+        </p:spPr>
+        <p:txBody>
+          <a:bodyPr wrap="square">
+            <a:spAutoFit/>
+          </a:bodyPr>
+          <a:lstStyle/>
+          <a:p>
+            <a:pPr>
+              <a:spcAft>
+                <a:spcPts val="600"/>
+              </a:spcAft>
+              <a:defRPr b="1" sz="2000">
+                <a:solidFill>
+                  <a:srgbClr val="333333"/>
+                </a:solidFill>
+              </a:defRPr>
+            </a:pPr>
+            <a:r>
+              <a:t>Finding Substrings:</a:t>
+            </a:r>
+          </a:p>
+          <a:p>
+            <a:pPr>
+              <a:spcAft>
+                <a:spcPts val="600"/>
+              </a:spcAft>
+              <a:defRPr sz="1600">
+                <a:solidFill>
+                  <a:srgbClr val="333333"/>
+                </a:solidFill>
+              </a:defRPr>
+            </a:pPr>
+            <a:r>
+              <a:t>text = "Python is awesome"</a:t>
+            </a:r>
+          </a:p>
+          <a:p>
+            <a:pPr>
+              <a:spcAft>
+                <a:spcPts val="600"/>
+              </a:spcAft>
+              <a:defRPr sz="1600">
+                <a:solidFill>
+                  <a:srgbClr val="333333"/>
+                </a:solidFill>
+              </a:defRPr>
+            </a:pPr>
+            <a:r>
+              <a:t>text.find("is")</a:t>
+            </a:r>
+          </a:p>
+          <a:p>
+            <a:pPr>
+              <a:spcAft>
+                <a:spcPts val="600"/>
+              </a:spcAft>
+              <a:defRPr sz="1600">
+                <a:solidFill>
+                  <a:srgbClr val="333333"/>
+                </a:solidFill>
+              </a:defRPr>
+            </a:pPr>
+            <a:r>
+              <a:t># 7 (index where "is" starts)</a:t>
+            </a:r>
+          </a:p>
+          <a:p>
+            <a:pPr>
+              <a:spcAft>
+                <a:spcPts val="600"/>
+              </a:spcAft>
+              <a:defRPr sz="1600">
+                <a:solidFill>
+                  <a:srgbClr val="333333"/>
+                </a:solidFill>
+              </a:defRPr>
+            </a:pPr>
+            <a:r>
+              <a:t>text.find("Java")</a:t>
+            </a:r>
+          </a:p>
+          <a:p>
+            <a:pPr>
+              <a:spcAft>
+                <a:spcPts val="600"/>
+              </a:spcAft>
+              <a:defRPr sz="1600">
+                <a:solidFill>
+                  <a:srgbClr val="333333"/>
+                </a:solidFill>
+              </a:defRPr>
+            </a:pPr>
+            <a:r>
+              <a:t># -1 (not found)</a:t>
+            </a:r>
+          </a:p>
+          <a:p>
+            <a:pPr>
+              <a:spcAft>
+                <a:spcPts val="600"/>
+              </a:spcAft>
+              <a:defRPr b="1" sz="2000">
+                <a:solidFill>
+                  <a:srgbClr val="333333"/>
+                </a:solidFill>
+              </a:defRPr>
+            </a:pPr>
+            <a:r>
+              <a:t>Checking if Substring Exists:</a:t>
+            </a:r>
+          </a:p>
+          <a:p>
+            <a:pPr>
+              <a:spcAft>
+                <a:spcPts val="600"/>
+              </a:spcAft>
+              <a:defRPr sz="1600">
+                <a:solidFill>
+                  <a:srgbClr val="333333"/>
+                </a:solidFill>
+              </a:defRPr>
+            </a:pPr>
+            <a:r>
+              <a:t>"Python" in text  # True</a:t>
+            </a:r>
+          </a:p>
+          <a:p>
+            <a:pPr>
+              <a:spcAft>
+                <a:spcPts val="600"/>
+              </a:spcAft>
+              <a:defRPr sz="1600">
+                <a:solidFill>
+                  <a:srgbClr val="333333"/>
+                </a:solidFill>
+              </a:defRPr>
+            </a:pPr>
+            <a:r>
+              <a:t>"Java" in text    # False</a:t>
+            </a:r>
+          </a:p>
+          <a:p>
+            <a:pPr>
+              <a:spcAft>
+                <a:spcPts val="600"/>
+              </a:spcAft>
+              <a:defRPr b="1" sz="2000">
+                <a:solidFill>
+                  <a:srgbClr val="333333"/>
+                </a:solidFill>
+              </a:defRPr>
+            </a:pPr>
+            <a:r>
+              <a:t>Counting Occurrences:</a:t>
+            </a:r>
+          </a:p>
+          <a:p>
+            <a:pPr>
+              <a:spcAft>
+                <a:spcPts val="600"/>
+              </a:spcAft>
+              <a:defRPr sz="1600">
+                <a:solidFill>
+                  <a:srgbClr val="333333"/>
+                </a:solidFill>
+              </a:defRPr>
+            </a:pPr>
+            <a:r>
+              <a:t>text.count("o")  # 2</a:t>
+            </a:r>
+          </a:p>
+          <a:p>
+            <a:pPr>
+              <a:spcAft>
+                <a:spcPts val="600"/>
+              </a:spcAft>
+              <a:defRPr b="1" sz="2000">
+                <a:solidFill>
+                  <a:srgbClr val="333333"/>
+                </a:solidFill>
+              </a:defRPr>
+            </a:pPr>
+            <a:r>
+              <a:t>Replacing Text:</a:t>
+            </a:r>
+          </a:p>
+          <a:p>
+            <a:pPr>
+              <a:spcAft>
+                <a:spcPts val="600"/>
+              </a:spcAft>
+              <a:defRPr sz="1600">
+                <a:solidFill>
+                  <a:srgbClr val="333333"/>
+                </a:solidFill>
+              </a:defRPr>
+            </a:pPr>
+            <a:r>
+              <a:t>text.replace("awesome", "powerful")</a:t>
+            </a:r>
+          </a:p>
+          <a:p>
+            <a:pPr>
+              <a:spcAft>
+                <a:spcPts val="600"/>
+              </a:spcAft>
+              <a:defRPr sz="1600">
+                <a:solidFill>
+                  <a:srgbClr val="333333"/>
+                </a:solidFill>
+              </a:defRPr>
+            </a:pPr>
+            <a:r>
+              <a:t># "Python is powerful"</a:t>
+            </a:r>
+          </a:p>
+          <a:p>
+            <a:pPr>
+              <a:spcAft>
+                <a:spcPts val="600"/>
+              </a:spcAft>
+              <a:defRPr b="1" sz="2000">
+                <a:solidFill>
+                  <a:srgbClr val="333333"/>
+                </a:solidFill>
+              </a:defRPr>
+            </a:pPr>
+            <a:r>
+              <a:t>Replace All Occurrences:</a:t>
+            </a:r>
+          </a:p>
+          <a:p>
+            <a:pPr>
+              <a:spcAft>
+                <a:spcPts val="600"/>
+              </a:spcAft>
+              <a:defRPr sz="1600">
+                <a:solidFill>
+                  <a:srgbClr val="333333"/>
+                </a:solidFill>
+              </a:defRPr>
+            </a:pPr>
+            <a:r>
+              <a:t>text = "ha ha ha"</a:t>
+            </a:r>
+          </a:p>
+          <a:p>
+            <a:pPr>
+              <a:spcAft>
+                <a:spcPts val="600"/>
+              </a:spcAft>
+              <a:defRPr sz="1600">
+                <a:solidFill>
+                  <a:srgbClr val="333333"/>
+                </a:solidFill>
+              </a:defRPr>
+            </a:pPr>
+            <a:r>
+              <a:t>text.replace("ha", "he")  # "he he he"</a:t>
+            </a:r>
+          </a:p>
+        </p:txBody>
+      </p:sp>
+    </p:spTree>
+  </p:cSld>
+  <p:clrMapOvr>
+    <a:masterClrMapping/>
+  </p:clrMapOvr>
+</p:sld>
+</file>
+
+<file path=ppt/slides/slide9.xml><?xml version="1.0" encoding="utf-8"?>
+<p:sld xmlns:a="http://schemas.openxmlformats.org/drawingml/2006/main" xmlns:p="http://schemas.openxmlformats.org/presentationml/2006/main" xmlns:r="http://schemas.openxmlformats.org/officeDocument/2006/relationships">
+  <p:cSld>
+    <p:spTree>
+      <p:nvGrpSpPr>
+        <p:cNvPr id="1" name=""/>
+        <p:cNvGrpSpPr/>
+        <p:nvPr/>
+      </p:nvGrpSpPr>
+      <p:grpSpPr/>
+      <p:sp>
+        <p:nvSpPr>
+          <p:cNvPr id="2" name="Rectangle 1"/>
+          <p:cNvSpPr/>
+          <p:nvPr/>
+        </p:nvSpPr>
+        <p:spPr>
+          <a:xfrm>
+            <a:off x="0" y="0"/>
+            <a:ext cx="12191695" cy="6858000"/>
+          </a:xfrm>
+          <a:prstGeom prst="rect">
+            <a:avLst/>
+          </a:prstGeom>
+          <a:solidFill>
+            <a:srgbClr val="FFFFFF"/>
+          </a:solidFill>
+          <a:ln>
+            <a:noFill/>
+          </a:ln>
+        </p:spPr>
+        <p:style>
+          <a:lnRef idx="1">
+            <a:schemeClr val="accent1"/>
+          </a:lnRef>
+          <a:fillRef idx="3">
+            <a:schemeClr val="accent1"/>
+          </a:fillRef>
+          <a:effectRef idx="2">
+            <a:schemeClr val="accent1"/>
+          </a:effectRef>
+          <a:fontRef idx="minor">
+            <a:schemeClr val="lt1"/>
+          </a:fontRef>
+        </p:style>
+        <p:txBody>
+          <a:bodyPr rtlCol="0" anchor="ctr"/>
+          <a:lstStyle/>
+          <a:p>
+            <a:pPr algn="ctr"/>
+          </a:p>
+        </p:txBody>
+      </p:sp>
+      <p:sp>
+        <p:nvSpPr>
+          <p:cNvPr id="3" name="Rectangle 2"/>
+          <p:cNvSpPr/>
+          <p:nvPr/>
+        </p:nvSpPr>
+        <p:spPr>
+          <a:xfrm>
+            <a:off x="0" y="0"/>
+            <a:ext cx="12191695" cy="137160"/>
+          </a:xfrm>
+          <a:prstGeom prst="rect">
+            <a:avLst/>
+          </a:prstGeom>
+          <a:solidFill>
+            <a:srgbClr val="0066CC"/>
+          </a:solidFill>
+          <a:ln>
+            <a:noFill/>
+          </a:ln>
+        </p:spPr>
+        <p:style>
+          <a:lnRef idx="1">
+            <a:schemeClr val="accent1"/>
+          </a:lnRef>
+          <a:fillRef idx="3">
+            <a:schemeClr val="accent1"/>
+          </a:fillRef>
+          <a:effectRef idx="2">
+            <a:schemeClr val="accent1"/>
+          </a:effectRef>
+          <a:fontRef idx="minor">
+            <a:schemeClr val="lt1"/>
+          </a:fontRef>
+        </p:style>
+        <p:txBody>
+          <a:bodyPr rtlCol="0" anchor="ctr"/>
+          <a:lstStyle/>
+          <a:p>
+            <a:pPr algn="ctr"/>
+          </a:p>
+        </p:txBody>
+      </p:sp>
+      <p:sp>
+        <p:nvSpPr>
+          <p:cNvPr id="4" name="TextBox 3"/>
+          <p:cNvSpPr txBox="1"/>
+          <p:nvPr/>
+        </p:nvSpPr>
+        <p:spPr>
+          <a:xfrm>
+            <a:off x="457200" y="320040"/>
+            <a:ext cx="10972800" cy="640080"/>
+          </a:xfrm>
+          <a:prstGeom prst="rect">
+            <a:avLst/>
+          </a:prstGeom>
+          <a:noFill/>
+        </p:spPr>
+        <p:txBody>
+          <a:bodyPr wrap="none">
+            <a:spAutoFit/>
+          </a:bodyPr>
+          <a:lstStyle/>
+          <a:p>
+            <a:pPr>
+              <a:defRPr sz="3600" b="1">
+                <a:solidFill>
+                  <a:srgbClr val="003366"/>
+                </a:solidFill>
+              </a:defRPr>
+            </a:pPr>
+            <a:r>
+              <a:t>String Methods: Split and Join</a:t>
+            </a:r>
+          </a:p>
+        </p:txBody>
+      </p:sp>
+      <p:sp>
+        <p:nvSpPr>
+          <p:cNvPr id="5" name="TextBox 4"/>
+          <p:cNvSpPr txBox="1"/>
+          <p:nvPr/>
+        </p:nvSpPr>
+        <p:spPr>
+          <a:xfrm>
+            <a:off x="640080" y="1188720"/>
+            <a:ext cx="10789920" cy="5303520"/>
+          </a:xfrm>
+          <a:prstGeom prst="rect">
+            <a:avLst/>
+          </a:prstGeom>
+          <a:noFill/>
+        </p:spPr>
+        <p:txBody>
+          <a:bodyPr wrap="square">
+            <a:spAutoFit/>
+          </a:bodyPr>
+          <a:lstStyle/>
+          <a:p>
+            <a:pPr>
+              <a:spcAft>
+                <a:spcPts val="600"/>
+              </a:spcAft>
+              <a:defRPr b="1" sz="2000">
+                <a:solidFill>
+                  <a:srgbClr val="333333"/>
+                </a:solidFill>
+              </a:defRPr>
+            </a:pPr>
+            <a:r>
+              <a:t>Splitting Strings into Lists:</a:t>
+            </a:r>
+          </a:p>
+          <a:p>
+            <a:pPr>
+              <a:spcAft>
+                <a:spcPts val="600"/>
+              </a:spcAft>
+              <a:defRPr sz="1600">
+                <a:solidFill>
+                  <a:srgbClr val="333333"/>
+                </a:solidFill>
+              </a:defRPr>
+            </a:pPr>
+            <a:r>
+              <a:t>text = "Python is awesome"</a:t>
+            </a:r>
+          </a:p>
+          <a:p>
+            <a:pPr>
+              <a:spcAft>
+                <a:spcPts val="600"/>
+              </a:spcAft>
+              <a:defRPr sz="1600">
+                <a:solidFill>
+                  <a:srgbClr val="333333"/>
+                </a:solidFill>
+              </a:defRPr>
+            </a:pPr>
+            <a:r>
+              <a:t>words = text.split()</a:t>
+            </a:r>
+          </a:p>
+          <a:p>
+            <a:pPr>
+              <a:spcAft>
+                <a:spcPts val="600"/>
+              </a:spcAft>
+              <a:defRPr sz="1600">
+                <a:solidFill>
+                  <a:srgbClr val="333333"/>
+                </a:solidFill>
+              </a:defRPr>
+            </a:pPr>
+            <a:r>
+              <a:t># ["Python", "is", "awesome"]</a:t>
+            </a:r>
+          </a:p>
+          <a:p>
+            <a:pPr>
+              <a:spcAft>
+                <a:spcPts val="600"/>
+              </a:spcAft>
+              <a:defRPr b="1" sz="2000">
+                <a:solidFill>
+                  <a:srgbClr val="333333"/>
+                </a:solidFill>
+              </a:defRPr>
+            </a:pPr>
+            <a:r>
+              <a:t>Split by Custom Separator:</a:t>
+            </a:r>
+          </a:p>
+          <a:p>
+            <a:pPr>
+              <a:spcAft>
+                <a:spcPts val="600"/>
+              </a:spcAft>
+              <a:defRPr sz="1600">
+                <a:solidFill>
+                  <a:srgbClr val="333333"/>
+                </a:solidFill>
+              </a:defRPr>
+            </a:pPr>
+            <a:r>
+              <a:t>csv = "John,Doe,25,NYC"</a:t>
+            </a:r>
+          </a:p>
+          <a:p>
+            <a:pPr>
+              <a:spcAft>
+                <a:spcPts val="600"/>
+              </a:spcAft>
+              <a:defRPr sz="1600">
+                <a:solidFill>
+                  <a:srgbClr val="333333"/>
+                </a:solidFill>
+              </a:defRPr>
+            </a:pPr>
+            <a:r>
+              <a:t>data = csv.split(",")</a:t>
+            </a:r>
+          </a:p>
+          <a:p>
+            <a:pPr>
+              <a:spcAft>
+                <a:spcPts val="600"/>
+              </a:spcAft>
+              <a:defRPr sz="1600">
+                <a:solidFill>
+                  <a:srgbClr val="333333"/>
+                </a:solidFill>
+              </a:defRPr>
+            </a:pPr>
+            <a:r>
+              <a:t># ["John", "Doe", "25", "NYC"]</a:t>
+            </a:r>
+          </a:p>
+          <a:p>
+            <a:pPr>
+              <a:spcAft>
+                <a:spcPts val="600"/>
+              </a:spcAft>
+              <a:defRPr b="1" sz="2000">
+                <a:solidFill>
+                  <a:srgbClr val="333333"/>
+                </a:solidFill>
+              </a:defRPr>
+            </a:pPr>
+            <a:r>
+              <a:t>Joining Lists into Strings:</a:t>
+            </a:r>
+          </a:p>
+          <a:p>
+            <a:pPr>
+              <a:spcAft>
+                <a:spcPts val="600"/>
+              </a:spcAft>
+              <a:defRPr sz="1600">
+                <a:solidFill>
+                  <a:srgbClr val="333333"/>
+                </a:solidFill>
+              </a:defRPr>
+            </a:pPr>
+            <a:r>
+              <a:t>words = ["Python", "is", "awesome"]</a:t>
+            </a:r>
+          </a:p>
+          <a:p>
+            <a:pPr>
+              <a:spcAft>
+                <a:spcPts val="600"/>
+              </a:spcAft>
+              <a:defRPr sz="1600">
+                <a:solidFill>
+                  <a:srgbClr val="333333"/>
+                </a:solidFill>
+              </a:defRPr>
+            </a:pPr>
+            <a:r>
+              <a:t>" ".join(words)</a:t>
+            </a:r>
+          </a:p>
+          <a:p>
+            <a:pPr>
+              <a:spcAft>
+                <a:spcPts val="600"/>
+              </a:spcAft>
+              <a:defRPr sz="1600">
+                <a:solidFill>
+                  <a:srgbClr val="333333"/>
+                </a:solidFill>
+              </a:defRPr>
+            </a:pPr>
+            <a:r>
+              <a:t># "Python is awesome"</a:t>
+            </a:r>
+          </a:p>
+          <a:p>
+            <a:pPr>
+              <a:spcAft>
+                <a:spcPts val="600"/>
+              </a:spcAft>
+              <a:defRPr b="1" sz="2000">
+                <a:solidFill>
+                  <a:srgbClr val="333333"/>
+                </a:solidFill>
+              </a:defRPr>
+            </a:pPr>
+            <a:r>
+              <a:t>Join with Different Separator:</a:t>
+            </a:r>
+          </a:p>
+          <a:p>
+            <a:pPr>
+              <a:spcAft>
+                <a:spcPts val="600"/>
+              </a:spcAft>
+              <a:defRPr sz="1600">
+                <a:solidFill>
+                  <a:srgbClr val="333333"/>
+                </a:solidFill>
+              </a:defRPr>
+            </a:pPr>
+            <a:r>
+              <a:t>"-".join(words)</a:t>
+            </a:r>
+          </a:p>
+          <a:p>
+            <a:pPr>
+              <a:spcAft>
+                <a:spcPts val="600"/>
+              </a:spcAft>
+              <a:defRPr sz="1600">
+                <a:solidFill>
+                  <a:srgbClr val="333333"/>
+                </a:solidFill>
+              </a:defRPr>
+            </a:pPr>
+            <a:r>
+              <a:t># "Python-is-awesome"</a:t>
+            </a:r>
+          </a:p>
+          <a:p>
+            <a:pPr>
+              <a:spcAft>
+                <a:spcPts val="600"/>
+              </a:spcAft>
+              <a:defRPr b="1" sz="2000">
+                <a:solidFill>
+                  <a:srgbClr val="333333"/>
+                </a:solidFill>
+              </a:defRPr>
+            </a:pPr>
+            <a:r>
+              <a:t>Practical Example:</a:t>
+            </a:r>
+          </a:p>
+          <a:p>
+            <a:pPr>
+              <a:spcAft>
+                <a:spcPts val="600"/>
+              </a:spcAft>
+              <a:defRPr sz="1600">
+                <a:solidFill>
+                  <a:srgbClr val="333333"/>
+                </a:solidFill>
+              </a:defRPr>
+            </a:pPr>
+            <a:r>
+              <a:t>path_parts = ["home", "user", "documents"]</a:t>
+            </a:r>
+          </a:p>
+          <a:p>
+            <a:pPr>
+              <a:spcAft>
+                <a:spcPts val="600"/>
+              </a:spcAft>
+              <a:defRPr sz="1600">
+                <a:solidFill>
+                  <a:srgbClr val="333333"/>
+                </a:solidFill>
+              </a:defRPr>
+            </a:pPr>
+            <a:r>
+              <a:t>path = "/".join(path_parts)</a:t>
+            </a:r>
+          </a:p>
+          <a:p>
+            <a:pPr>
+              <a:spcAft>
+                <a:spcPts val="600"/>
+              </a:spcAft>
+              <a:defRPr sz="1600">
+                <a:solidFill>
+                  <a:srgbClr val="333333"/>
+                </a:solidFill>
+              </a:defRPr>
+            </a:pPr>
+            <a:r>
+              <a:t># "home/user/documents"</a:t>
             </a:r>
           </a:p>
         </p:txBody>
